--- a/reference_doc/pcie/notebook/PCIE协议-Capability结构.pptx
+++ b/reference_doc/pcie/notebook/PCIE协议-Capability结构.pptx
@@ -123,6 +123,11 @@
       </a:defRPr>
     </a:lvl9pPr>
   </p:defaultTextStyle>
+  <p:extLst>
+    <p:ext uri="{EFAFB233-063F-42B5-8137-9DF3F51BA10A}">
+      <p15:sldGuideLst xmlns:p15="http://schemas.microsoft.com/office/powerpoint/2012/main"/>
+    </p:ext>
+  </p:extLst>
 </p:presentation>
 </file>
 
@@ -208,7 +213,7 @@
           <a:p>
             <a:fld id="{D64DA5B1-98BD-49C8-AEB8-FBCADE7D2823}" type="datetimeFigureOut">
               <a:rPr lang="zh-CN" altLang="en-US" smtClean="0"/>
-              <a:t>2025/4/22</a:t>
+              <a:t>2025/6/4</a:t>
             </a:fld>
             <a:endParaRPr lang="zh-CN" altLang="en-US"/>
           </a:p>
@@ -1777,7 +1782,7 @@
           <a:p>
             <a:fld id="{2E11CC0D-85EA-4F4D-90BA-514A7641B90E}" type="datetimeFigureOut">
               <a:rPr lang="zh-CN" altLang="en-US" smtClean="0"/>
-              <a:t>2025/4/22</a:t>
+              <a:t>2025/6/4</a:t>
             </a:fld>
             <a:endParaRPr lang="zh-CN" altLang="en-US"/>
           </a:p>
@@ -1975,7 +1980,7 @@
           <a:p>
             <a:fld id="{2E11CC0D-85EA-4F4D-90BA-514A7641B90E}" type="datetimeFigureOut">
               <a:rPr lang="zh-CN" altLang="en-US" smtClean="0"/>
-              <a:t>2025/4/22</a:t>
+              <a:t>2025/6/4</a:t>
             </a:fld>
             <a:endParaRPr lang="zh-CN" altLang="en-US"/>
           </a:p>
@@ -2183,7 +2188,7 @@
           <a:p>
             <a:fld id="{2E11CC0D-85EA-4F4D-90BA-514A7641B90E}" type="datetimeFigureOut">
               <a:rPr lang="zh-CN" altLang="en-US" smtClean="0"/>
-              <a:t>2025/4/22</a:t>
+              <a:t>2025/6/4</a:t>
             </a:fld>
             <a:endParaRPr lang="zh-CN" altLang="en-US"/>
           </a:p>
@@ -2381,7 +2386,7 @@
           <a:p>
             <a:fld id="{2E11CC0D-85EA-4F4D-90BA-514A7641B90E}" type="datetimeFigureOut">
               <a:rPr lang="zh-CN" altLang="en-US" smtClean="0"/>
-              <a:t>2025/4/22</a:t>
+              <a:t>2025/6/4</a:t>
             </a:fld>
             <a:endParaRPr lang="zh-CN" altLang="en-US"/>
           </a:p>
@@ -2656,7 +2661,7 @@
           <a:p>
             <a:fld id="{2E11CC0D-85EA-4F4D-90BA-514A7641B90E}" type="datetimeFigureOut">
               <a:rPr lang="zh-CN" altLang="en-US" smtClean="0"/>
-              <a:t>2025/4/22</a:t>
+              <a:t>2025/6/4</a:t>
             </a:fld>
             <a:endParaRPr lang="zh-CN" altLang="en-US"/>
           </a:p>
@@ -2921,7 +2926,7 @@
           <a:p>
             <a:fld id="{2E11CC0D-85EA-4F4D-90BA-514A7641B90E}" type="datetimeFigureOut">
               <a:rPr lang="zh-CN" altLang="en-US" smtClean="0"/>
-              <a:t>2025/4/22</a:t>
+              <a:t>2025/6/4</a:t>
             </a:fld>
             <a:endParaRPr lang="zh-CN" altLang="en-US"/>
           </a:p>
@@ -3333,7 +3338,7 @@
           <a:p>
             <a:fld id="{2E11CC0D-85EA-4F4D-90BA-514A7641B90E}" type="datetimeFigureOut">
               <a:rPr lang="zh-CN" altLang="en-US" smtClean="0"/>
-              <a:t>2025/4/22</a:t>
+              <a:t>2025/6/4</a:t>
             </a:fld>
             <a:endParaRPr lang="zh-CN" altLang="en-US"/>
           </a:p>
@@ -3474,7 +3479,7 @@
           <a:p>
             <a:fld id="{2E11CC0D-85EA-4F4D-90BA-514A7641B90E}" type="datetimeFigureOut">
               <a:rPr lang="zh-CN" altLang="en-US" smtClean="0"/>
-              <a:t>2025/4/22</a:t>
+              <a:t>2025/6/4</a:t>
             </a:fld>
             <a:endParaRPr lang="zh-CN" altLang="en-US"/>
           </a:p>
@@ -3587,7 +3592,7 @@
           <a:p>
             <a:fld id="{2E11CC0D-85EA-4F4D-90BA-514A7641B90E}" type="datetimeFigureOut">
               <a:rPr lang="zh-CN" altLang="en-US" smtClean="0"/>
-              <a:t>2025/4/22</a:t>
+              <a:t>2025/6/4</a:t>
             </a:fld>
             <a:endParaRPr lang="zh-CN" altLang="en-US"/>
           </a:p>
@@ -3898,7 +3903,7 @@
           <a:p>
             <a:fld id="{2E11CC0D-85EA-4F4D-90BA-514A7641B90E}" type="datetimeFigureOut">
               <a:rPr lang="zh-CN" altLang="en-US" smtClean="0"/>
-              <a:t>2025/4/22</a:t>
+              <a:t>2025/6/4</a:t>
             </a:fld>
             <a:endParaRPr lang="zh-CN" altLang="en-US"/>
           </a:p>
@@ -4186,7 +4191,7 @@
           <a:p>
             <a:fld id="{2E11CC0D-85EA-4F4D-90BA-514A7641B90E}" type="datetimeFigureOut">
               <a:rPr lang="zh-CN" altLang="en-US" smtClean="0"/>
-              <a:t>2025/4/22</a:t>
+              <a:t>2025/6/4</a:t>
             </a:fld>
             <a:endParaRPr lang="zh-CN" altLang="en-US"/>
           </a:p>
@@ -4427,7 +4432,7 @@
           <a:p>
             <a:fld id="{2E11CC0D-85EA-4F4D-90BA-514A7641B90E}" type="datetimeFigureOut">
               <a:rPr lang="zh-CN" altLang="en-US" smtClean="0"/>
-              <a:t>2025/4/22</a:t>
+              <a:t>2025/6/4</a:t>
             </a:fld>
             <a:endParaRPr lang="zh-CN" altLang="en-US"/>
           </a:p>

--- a/reference_doc/pcie/notebook/PCIE协议-Capability结构.pptx
+++ b/reference_doc/pcie/notebook/PCIE协议-Capability结构.pptx
@@ -5,7 +5,7 @@
     <p:sldMasterId id="2147483648" r:id="rId1"/>
   </p:sldMasterIdLst>
   <p:notesMasterIdLst>
-    <p:notesMasterId r:id="rId19"/>
+    <p:notesMasterId r:id="rId29"/>
   </p:notesMasterIdLst>
   <p:sldIdLst>
     <p:sldId id="256" r:id="rId2"/>
@@ -23,8 +23,18 @@
     <p:sldId id="265" r:id="rId14"/>
     <p:sldId id="266" r:id="rId15"/>
     <p:sldId id="270" r:id="rId16"/>
-    <p:sldId id="271" r:id="rId17"/>
-    <p:sldId id="272" r:id="rId18"/>
+    <p:sldId id="281" r:id="rId17"/>
+    <p:sldId id="282" r:id="rId18"/>
+    <p:sldId id="271" r:id="rId19"/>
+    <p:sldId id="274" r:id="rId20"/>
+    <p:sldId id="275" r:id="rId21"/>
+    <p:sldId id="276" r:id="rId22"/>
+    <p:sldId id="273" r:id="rId23"/>
+    <p:sldId id="272" r:id="rId24"/>
+    <p:sldId id="277" r:id="rId25"/>
+    <p:sldId id="278" r:id="rId26"/>
+    <p:sldId id="279" r:id="rId27"/>
+    <p:sldId id="280" r:id="rId28"/>
   </p:sldIdLst>
   <p:sldSz cx="12192000" cy="6858000"/>
   <p:notesSz cx="6858000" cy="9144000"/>
@@ -213,7 +223,7 @@
           <a:p>
             <a:fld id="{D64DA5B1-98BD-49C8-AEB8-FBCADE7D2823}" type="datetimeFigureOut">
               <a:rPr lang="zh-CN" altLang="en-US" smtClean="0"/>
-              <a:t>2025/6/4</a:t>
+              <a:t>2025/6/26</a:t>
             </a:fld>
             <a:endParaRPr lang="zh-CN" altLang="en-US"/>
           </a:p>
@@ -1782,7 +1792,7 @@
           <a:p>
             <a:fld id="{2E11CC0D-85EA-4F4D-90BA-514A7641B90E}" type="datetimeFigureOut">
               <a:rPr lang="zh-CN" altLang="en-US" smtClean="0"/>
-              <a:t>2025/6/4</a:t>
+              <a:t>2025/6/26</a:t>
             </a:fld>
             <a:endParaRPr lang="zh-CN" altLang="en-US"/>
           </a:p>
@@ -1980,7 +1990,7 @@
           <a:p>
             <a:fld id="{2E11CC0D-85EA-4F4D-90BA-514A7641B90E}" type="datetimeFigureOut">
               <a:rPr lang="zh-CN" altLang="en-US" smtClean="0"/>
-              <a:t>2025/6/4</a:t>
+              <a:t>2025/6/26</a:t>
             </a:fld>
             <a:endParaRPr lang="zh-CN" altLang="en-US"/>
           </a:p>
@@ -2188,7 +2198,7 @@
           <a:p>
             <a:fld id="{2E11CC0D-85EA-4F4D-90BA-514A7641B90E}" type="datetimeFigureOut">
               <a:rPr lang="zh-CN" altLang="en-US" smtClean="0"/>
-              <a:t>2025/6/4</a:t>
+              <a:t>2025/6/26</a:t>
             </a:fld>
             <a:endParaRPr lang="zh-CN" altLang="en-US"/>
           </a:p>
@@ -2386,7 +2396,7 @@
           <a:p>
             <a:fld id="{2E11CC0D-85EA-4F4D-90BA-514A7641B90E}" type="datetimeFigureOut">
               <a:rPr lang="zh-CN" altLang="en-US" smtClean="0"/>
-              <a:t>2025/6/4</a:t>
+              <a:t>2025/6/26</a:t>
             </a:fld>
             <a:endParaRPr lang="zh-CN" altLang="en-US"/>
           </a:p>
@@ -2661,7 +2671,7 @@
           <a:p>
             <a:fld id="{2E11CC0D-85EA-4F4D-90BA-514A7641B90E}" type="datetimeFigureOut">
               <a:rPr lang="zh-CN" altLang="en-US" smtClean="0"/>
-              <a:t>2025/6/4</a:t>
+              <a:t>2025/6/26</a:t>
             </a:fld>
             <a:endParaRPr lang="zh-CN" altLang="en-US"/>
           </a:p>
@@ -2926,7 +2936,7 @@
           <a:p>
             <a:fld id="{2E11CC0D-85EA-4F4D-90BA-514A7641B90E}" type="datetimeFigureOut">
               <a:rPr lang="zh-CN" altLang="en-US" smtClean="0"/>
-              <a:t>2025/6/4</a:t>
+              <a:t>2025/6/26</a:t>
             </a:fld>
             <a:endParaRPr lang="zh-CN" altLang="en-US"/>
           </a:p>
@@ -3338,7 +3348,7 @@
           <a:p>
             <a:fld id="{2E11CC0D-85EA-4F4D-90BA-514A7641B90E}" type="datetimeFigureOut">
               <a:rPr lang="zh-CN" altLang="en-US" smtClean="0"/>
-              <a:t>2025/6/4</a:t>
+              <a:t>2025/6/26</a:t>
             </a:fld>
             <a:endParaRPr lang="zh-CN" altLang="en-US"/>
           </a:p>
@@ -3479,7 +3489,7 @@
           <a:p>
             <a:fld id="{2E11CC0D-85EA-4F4D-90BA-514A7641B90E}" type="datetimeFigureOut">
               <a:rPr lang="zh-CN" altLang="en-US" smtClean="0"/>
-              <a:t>2025/6/4</a:t>
+              <a:t>2025/6/26</a:t>
             </a:fld>
             <a:endParaRPr lang="zh-CN" altLang="en-US"/>
           </a:p>
@@ -3592,7 +3602,7 @@
           <a:p>
             <a:fld id="{2E11CC0D-85EA-4F4D-90BA-514A7641B90E}" type="datetimeFigureOut">
               <a:rPr lang="zh-CN" altLang="en-US" smtClean="0"/>
-              <a:t>2025/6/4</a:t>
+              <a:t>2025/6/26</a:t>
             </a:fld>
             <a:endParaRPr lang="zh-CN" altLang="en-US"/>
           </a:p>
@@ -3903,7 +3913,7 @@
           <a:p>
             <a:fld id="{2E11CC0D-85EA-4F4D-90BA-514A7641B90E}" type="datetimeFigureOut">
               <a:rPr lang="zh-CN" altLang="en-US" smtClean="0"/>
-              <a:t>2025/6/4</a:t>
+              <a:t>2025/6/26</a:t>
             </a:fld>
             <a:endParaRPr lang="zh-CN" altLang="en-US"/>
           </a:p>
@@ -4191,7 +4201,7 @@
           <a:p>
             <a:fld id="{2E11CC0D-85EA-4F4D-90BA-514A7641B90E}" type="datetimeFigureOut">
               <a:rPr lang="zh-CN" altLang="en-US" smtClean="0"/>
-              <a:t>2025/6/4</a:t>
+              <a:t>2025/6/26</a:t>
             </a:fld>
             <a:endParaRPr lang="zh-CN" altLang="en-US"/>
           </a:p>
@@ -4432,7 +4442,7 @@
           <a:p>
             <a:fld id="{2E11CC0D-85EA-4F4D-90BA-514A7641B90E}" type="datetimeFigureOut">
               <a:rPr lang="zh-CN" altLang="en-US" smtClean="0"/>
-              <a:t>2025/6/4</a:t>
+              <a:t>2025/6/26</a:t>
             </a:fld>
             <a:endParaRPr lang="zh-CN" altLang="en-US"/>
           </a:p>
@@ -5406,7 +5416,7 @@
         <p:spPr>
           <a:xfrm>
             <a:off x="107504" y="2475989"/>
-            <a:ext cx="7093396" cy="3785652"/>
+            <a:ext cx="7300164" cy="3893990"/>
           </a:xfrm>
           <a:prstGeom prst="rect">
             <a:avLst/>
@@ -6911,8 +6921,38 @@
         </p:blipFill>
         <p:spPr>
           <a:xfrm>
-            <a:off x="2247236" y="378069"/>
+            <a:off x="575876" y="596430"/>
             <a:ext cx="7697527" cy="5115790"/>
+          </a:xfrm>
+          <a:prstGeom prst="rect">
+            <a:avLst/>
+          </a:prstGeom>
+        </p:spPr>
+      </p:pic>
+      <p:pic>
+        <p:nvPicPr>
+          <p:cNvPr id="4" name="图片 3">
+            <a:extLst>
+              <a:ext uri="{FF2B5EF4-FFF2-40B4-BE49-F238E27FC236}">
+                <a16:creationId xmlns:a16="http://schemas.microsoft.com/office/drawing/2014/main" id="{2E9C3509-CA7A-8DE2-518E-4C940DB33379}"/>
+              </a:ext>
+            </a:extLst>
+          </p:cNvPr>
+          <p:cNvPicPr>
+            <a:picLocks noChangeAspect="1"/>
+          </p:cNvPicPr>
+          <p:nvPr/>
+        </p:nvPicPr>
+        <p:blipFill>
+          <a:blip r:embed="rId3"/>
+          <a:stretch>
+            <a:fillRect/>
+          </a:stretch>
+        </p:blipFill>
+        <p:spPr>
+          <a:xfrm>
+            <a:off x="8898220" y="0"/>
+            <a:ext cx="2861465" cy="6858000"/>
           </a:xfrm>
           <a:prstGeom prst="rect">
             <a:avLst/>
@@ -7066,8 +7106,8 @@
         </p:nvSpPr>
         <p:spPr>
           <a:xfrm>
-            <a:off x="42984" y="1180285"/>
-            <a:ext cx="5044164" cy="923330"/>
+            <a:off x="107504" y="1180285"/>
+            <a:ext cx="5044164" cy="1477328"/>
           </a:xfrm>
           <a:prstGeom prst="rect">
             <a:avLst/>
@@ -7197,7 +7237,7 @@
                 <a:ea typeface="华文宋体" panose="02010600040101010101" pitchFamily="2" charset="-122"/>
                 <a:cs typeface="Times New Roman" panose="02020603050405020304" pitchFamily="18" charset="0"/>
               </a:rPr>
-              <a:t>的寄存器来产生中断通知到</a:t>
+              <a:t>的</a:t>
             </a:r>
             <a:r>
               <a:rPr lang="en-US" altLang="zh-CN" sz="1800" b="0" i="0" dirty="0">
@@ -7209,7 +7249,104 @@
                 <a:ea typeface="华文宋体" panose="02010600040101010101" pitchFamily="2" charset="-122"/>
                 <a:cs typeface="Times New Roman" panose="02020603050405020304" pitchFamily="18" charset="0"/>
               </a:rPr>
+              <a:t>ITS GITS_TRANSLATOR</a:t>
+            </a:r>
+            <a:r>
+              <a:rPr lang="zh-CN" altLang="en-US" sz="1800" b="0" i="0" dirty="0">
+                <a:solidFill>
+                  <a:srgbClr val="000000"/>
+                </a:solidFill>
+                <a:effectLst/>
+                <a:latin typeface="Times New Roman" panose="02020603050405020304" pitchFamily="18" charset="0"/>
+                <a:ea typeface="华文宋体" panose="02010600040101010101" pitchFamily="2" charset="-122"/>
+                <a:cs typeface="Times New Roman" panose="02020603050405020304" pitchFamily="18" charset="0"/>
+              </a:rPr>
+              <a:t>寄存器来产生中断通知到</a:t>
+            </a:r>
+            <a:r>
+              <a:rPr lang="en-US" altLang="zh-CN" sz="1800" b="0" i="0" dirty="0">
+                <a:solidFill>
+                  <a:srgbClr val="000000"/>
+                </a:solidFill>
+                <a:effectLst/>
+                <a:latin typeface="Times New Roman" panose="02020603050405020304" pitchFamily="18" charset="0"/>
+                <a:ea typeface="华文宋体" panose="02010600040101010101" pitchFamily="2" charset="-122"/>
+                <a:cs typeface="Times New Roman" panose="02020603050405020304" pitchFamily="18" charset="0"/>
+              </a:rPr>
               <a:t>CPU</a:t>
+            </a:r>
+          </a:p>
+          <a:p>
+            <a:r>
+              <a:rPr lang="en-US" altLang="zh-CN" dirty="0">
+                <a:solidFill>
+                  <a:srgbClr val="000000"/>
+                </a:solidFill>
+                <a:latin typeface="Times New Roman" panose="02020603050405020304" pitchFamily="18" charset="0"/>
+                <a:ea typeface="华文宋体" panose="02010600040101010101" pitchFamily="2" charset="-122"/>
+                <a:cs typeface="Times New Roman" panose="02020603050405020304" pitchFamily="18" charset="0"/>
+              </a:rPr>
+              <a:t>MSI Message Data</a:t>
+            </a:r>
+            <a:r>
+              <a:rPr lang="zh-CN" altLang="en-US" dirty="0">
+                <a:solidFill>
+                  <a:srgbClr val="000000"/>
+                </a:solidFill>
+                <a:latin typeface="Times New Roman" panose="02020603050405020304" pitchFamily="18" charset="0"/>
+                <a:ea typeface="华文宋体" panose="02010600040101010101" pitchFamily="2" charset="-122"/>
+                <a:cs typeface="Times New Roman" panose="02020603050405020304" pitchFamily="18" charset="0"/>
+              </a:rPr>
+              <a:t>作为</a:t>
+            </a:r>
+            <a:r>
+              <a:rPr lang="en-US" altLang="zh-CN" dirty="0">
+                <a:solidFill>
+                  <a:srgbClr val="000000"/>
+                </a:solidFill>
+                <a:latin typeface="Times New Roman" panose="02020603050405020304" pitchFamily="18" charset="0"/>
+                <a:ea typeface="华文宋体" panose="02010600040101010101" pitchFamily="2" charset="-122"/>
+                <a:cs typeface="Times New Roman" panose="02020603050405020304" pitchFamily="18" charset="0"/>
+              </a:rPr>
+              <a:t>event id</a:t>
+            </a:r>
+          </a:p>
+          <a:p>
+            <a:r>
+              <a:rPr lang="en-US" altLang="zh-CN" sz="1800" b="0" i="0" dirty="0">
+                <a:solidFill>
+                  <a:srgbClr val="000000"/>
+                </a:solidFill>
+                <a:effectLst/>
+                <a:latin typeface="Times New Roman" panose="02020603050405020304" pitchFamily="18" charset="0"/>
+                <a:ea typeface="华文宋体" panose="02010600040101010101" pitchFamily="2" charset="-122"/>
+                <a:cs typeface="Times New Roman" panose="02020603050405020304" pitchFamily="18" charset="0"/>
+              </a:rPr>
+              <a:t>Device id</a:t>
+            </a:r>
+            <a:r>
+              <a:rPr lang="zh-CN" altLang="en-US" sz="1800" b="0" i="0" dirty="0">
+                <a:solidFill>
+                  <a:srgbClr val="000000"/>
+                </a:solidFill>
+                <a:effectLst/>
+                <a:latin typeface="Times New Roman" panose="02020603050405020304" pitchFamily="18" charset="0"/>
+                <a:ea typeface="华文宋体" panose="02010600040101010101" pitchFamily="2" charset="-122"/>
+                <a:cs typeface="Times New Roman" panose="02020603050405020304" pitchFamily="18" charset="0"/>
+              </a:rPr>
+              <a:t>作为随路信号传输给</a:t>
+            </a:r>
+            <a:r>
+              <a:rPr lang="en-US" altLang="zh-CN" sz="1800" b="0" i="0" dirty="0">
+                <a:solidFill>
+                  <a:srgbClr val="000000"/>
+                </a:solidFill>
+                <a:effectLst/>
+                <a:latin typeface="Times New Roman" panose="02020603050405020304" pitchFamily="18" charset="0"/>
+                <a:ea typeface="华文宋体" panose="02010600040101010101" pitchFamily="2" charset="-122"/>
+                <a:cs typeface="Times New Roman" panose="02020603050405020304" pitchFamily="18" charset="0"/>
+              </a:rPr>
+              <a:t>GIC ITS</a:t>
             </a:r>
             <a:r>
               <a:rPr lang="zh-CN" altLang="en-US" sz="1800" b="0" i="0" dirty="0">
@@ -7267,6 +7404,401 @@
           <a:chExt cx="0" cy="0"/>
         </a:xfrm>
       </p:grpSpPr>
+      <p:sp>
+        <p:nvSpPr>
+          <p:cNvPr id="2" name="标题 6">
+            <a:extLst>
+              <a:ext uri="{FF2B5EF4-FFF2-40B4-BE49-F238E27FC236}">
+                <a16:creationId xmlns:a16="http://schemas.microsoft.com/office/drawing/2014/main" id="{3D0BD224-9C48-2267-150A-E27C0B65FB1D}"/>
+              </a:ext>
+            </a:extLst>
+          </p:cNvPr>
+          <p:cNvSpPr>
+            <a:spLocks noGrp="1"/>
+          </p:cNvSpPr>
+          <p:nvPr>
+            <p:ph type="title"/>
+            <p:custDataLst>
+              <p:tags r:id="rId1"/>
+            </p:custDataLst>
+          </p:nvPr>
+        </p:nvSpPr>
+        <p:spPr>
+          <a:xfrm>
+            <a:off x="107504" y="188640"/>
+            <a:ext cx="8508365" cy="461010"/>
+          </a:xfrm>
+        </p:spPr>
+        <p:txBody>
+          <a:bodyPr>
+            <a:normAutofit fontScale="90000"/>
+          </a:bodyPr>
+          <a:lstStyle/>
+          <a:p>
+            <a:pPr algn="l"/>
+            <a:r>
+              <a:rPr lang="en-US" altLang="zh-CN" sz="3600" dirty="0">
+                <a:gradFill>
+                  <a:gsLst>
+                    <a:gs pos="0">
+                      <a:srgbClr val="E30000"/>
+                    </a:gs>
+                    <a:gs pos="100000">
+                      <a:srgbClr val="760303"/>
+                    </a:gs>
+                  </a:gsLst>
+                  <a:lin scaled="0"/>
+                </a:gradFill>
+              </a:rPr>
+              <a:t>MSIX</a:t>
+            </a:r>
+            <a:endParaRPr lang="zh-CN" altLang="en-US" sz="3600" dirty="0">
+              <a:gradFill>
+                <a:gsLst>
+                  <a:gs pos="0">
+                    <a:srgbClr val="E30000"/>
+                  </a:gs>
+                  <a:gs pos="100000">
+                    <a:srgbClr val="760303"/>
+                  </a:gs>
+                </a:gsLst>
+                <a:lin scaled="0"/>
+              </a:gradFill>
+            </a:endParaRPr>
+          </a:p>
+        </p:txBody>
+      </p:sp>
+      <p:pic>
+        <p:nvPicPr>
+          <p:cNvPr id="4" name="图片 3">
+            <a:extLst>
+              <a:ext uri="{FF2B5EF4-FFF2-40B4-BE49-F238E27FC236}">
+                <a16:creationId xmlns:a16="http://schemas.microsoft.com/office/drawing/2014/main" id="{32759FE9-CA81-A02C-A672-64DFD3C6C081}"/>
+              </a:ext>
+            </a:extLst>
+          </p:cNvPr>
+          <p:cNvPicPr>
+            <a:picLocks noChangeAspect="1"/>
+          </p:cNvPicPr>
+          <p:nvPr/>
+        </p:nvPicPr>
+        <p:blipFill>
+          <a:blip r:embed="rId3"/>
+          <a:stretch>
+            <a:fillRect/>
+          </a:stretch>
+        </p:blipFill>
+        <p:spPr>
+          <a:xfrm>
+            <a:off x="5219207" y="0"/>
+            <a:ext cx="6972793" cy="4226119"/>
+          </a:xfrm>
+          <a:prstGeom prst="rect">
+            <a:avLst/>
+          </a:prstGeom>
+        </p:spPr>
+      </p:pic>
+      <p:pic>
+        <p:nvPicPr>
+          <p:cNvPr id="6" name="图片 5">
+            <a:extLst>
+              <a:ext uri="{FF2B5EF4-FFF2-40B4-BE49-F238E27FC236}">
+                <a16:creationId xmlns:a16="http://schemas.microsoft.com/office/drawing/2014/main" id="{F638DDE4-0A70-C07C-1A36-6291BF93F9EF}"/>
+              </a:ext>
+            </a:extLst>
+          </p:cNvPr>
+          <p:cNvPicPr>
+            <a:picLocks noChangeAspect="1"/>
+          </p:cNvPicPr>
+          <p:nvPr/>
+        </p:nvPicPr>
+        <p:blipFill>
+          <a:blip r:embed="rId4"/>
+          <a:stretch>
+            <a:fillRect/>
+          </a:stretch>
+        </p:blipFill>
+        <p:spPr>
+          <a:xfrm>
+            <a:off x="107504" y="5746030"/>
+            <a:ext cx="5250098" cy="923330"/>
+          </a:xfrm>
+          <a:prstGeom prst="rect">
+            <a:avLst/>
+          </a:prstGeom>
+        </p:spPr>
+      </p:pic>
+      <p:sp>
+        <p:nvSpPr>
+          <p:cNvPr id="7" name="文本框 6">
+            <a:extLst>
+              <a:ext uri="{FF2B5EF4-FFF2-40B4-BE49-F238E27FC236}">
+                <a16:creationId xmlns:a16="http://schemas.microsoft.com/office/drawing/2014/main" id="{21916696-2CA7-E72B-ACC4-D525644F568D}"/>
+              </a:ext>
+            </a:extLst>
+          </p:cNvPr>
+          <p:cNvSpPr txBox="1"/>
+          <p:nvPr/>
+        </p:nvSpPr>
+        <p:spPr>
+          <a:xfrm>
+            <a:off x="107504" y="1180285"/>
+            <a:ext cx="5044164" cy="923330"/>
+          </a:xfrm>
+          <a:prstGeom prst="rect">
+            <a:avLst/>
+          </a:prstGeom>
+          <a:noFill/>
+        </p:spPr>
+        <p:txBody>
+          <a:bodyPr wrap="square">
+            <a:spAutoFit/>
+          </a:bodyPr>
+          <a:lstStyle/>
+          <a:p>
+            <a:r>
+              <a:rPr lang="en-US" altLang="zh-CN" sz="1800" b="0" i="0" dirty="0">
+                <a:solidFill>
+                  <a:srgbClr val="000000"/>
+                </a:solidFill>
+                <a:effectLst/>
+                <a:latin typeface="Times New Roman" panose="02020603050405020304" pitchFamily="18" charset="0"/>
+                <a:ea typeface="华文宋体" panose="02010600040101010101" pitchFamily="2" charset="-122"/>
+                <a:cs typeface="Times New Roman" panose="02020603050405020304" pitchFamily="18" charset="0"/>
+              </a:rPr>
+              <a:t>MSIX</a:t>
+            </a:r>
+            <a:r>
+              <a:rPr lang="zh-CN" altLang="en-US" dirty="0">
+                <a:solidFill>
+                  <a:srgbClr val="000000"/>
+                </a:solidFill>
+                <a:latin typeface="Times New Roman" panose="02020603050405020304" pitchFamily="18" charset="0"/>
+                <a:ea typeface="华文宋体" panose="02010600040101010101" pitchFamily="2" charset="-122"/>
+                <a:cs typeface="Times New Roman" panose="02020603050405020304" pitchFamily="18" charset="0"/>
+              </a:rPr>
+              <a:t>跟</a:t>
+            </a:r>
+            <a:r>
+              <a:rPr lang="en-US" altLang="zh-CN" dirty="0">
+                <a:solidFill>
+                  <a:srgbClr val="000000"/>
+                </a:solidFill>
+                <a:latin typeface="Times New Roman" panose="02020603050405020304" pitchFamily="18" charset="0"/>
+                <a:ea typeface="华文宋体" panose="02010600040101010101" pitchFamily="2" charset="-122"/>
+                <a:cs typeface="Times New Roman" panose="02020603050405020304" pitchFamily="18" charset="0"/>
+              </a:rPr>
+              <a:t>MSI</a:t>
+            </a:r>
+            <a:r>
+              <a:rPr lang="zh-CN" altLang="en-US" dirty="0">
+                <a:solidFill>
+                  <a:srgbClr val="000000"/>
+                </a:solidFill>
+                <a:latin typeface="Times New Roman" panose="02020603050405020304" pitchFamily="18" charset="0"/>
+                <a:ea typeface="华文宋体" panose="02010600040101010101" pitchFamily="2" charset="-122"/>
+                <a:cs typeface="Times New Roman" panose="02020603050405020304" pitchFamily="18" charset="0"/>
+              </a:rPr>
+              <a:t>的差异是</a:t>
+            </a:r>
+            <a:r>
+              <a:rPr lang="en-US" altLang="zh-CN" dirty="0">
+                <a:solidFill>
+                  <a:srgbClr val="000000"/>
+                </a:solidFill>
+                <a:latin typeface="Times New Roman" panose="02020603050405020304" pitchFamily="18" charset="0"/>
+                <a:ea typeface="华文宋体" panose="02010600040101010101" pitchFamily="2" charset="-122"/>
+                <a:cs typeface="Times New Roman" panose="02020603050405020304" pitchFamily="18" charset="0"/>
+              </a:rPr>
+              <a:t>MSIX</a:t>
+            </a:r>
+            <a:r>
+              <a:rPr lang="zh-CN" altLang="en-US" dirty="0">
+                <a:solidFill>
+                  <a:srgbClr val="000000"/>
+                </a:solidFill>
+                <a:latin typeface="Times New Roman" panose="02020603050405020304" pitchFamily="18" charset="0"/>
+                <a:ea typeface="华文宋体" panose="02010600040101010101" pitchFamily="2" charset="-122"/>
+                <a:cs typeface="Times New Roman" panose="02020603050405020304" pitchFamily="18" charset="0"/>
+              </a:rPr>
+              <a:t>的</a:t>
+            </a:r>
+            <a:r>
+              <a:rPr lang="en-US" altLang="zh-CN" dirty="0">
+                <a:solidFill>
+                  <a:srgbClr val="000000"/>
+                </a:solidFill>
+                <a:latin typeface="Times New Roman" panose="02020603050405020304" pitchFamily="18" charset="0"/>
+                <a:ea typeface="华文宋体" panose="02010600040101010101" pitchFamily="2" charset="-122"/>
+                <a:cs typeface="Times New Roman" panose="02020603050405020304" pitchFamily="18" charset="0"/>
+              </a:rPr>
+              <a:t>table</a:t>
+            </a:r>
+            <a:r>
+              <a:rPr lang="zh-CN" altLang="en-US" dirty="0">
+                <a:solidFill>
+                  <a:srgbClr val="000000"/>
+                </a:solidFill>
+                <a:latin typeface="Times New Roman" panose="02020603050405020304" pitchFamily="18" charset="0"/>
+                <a:ea typeface="华文宋体" panose="02010600040101010101" pitchFamily="2" charset="-122"/>
+                <a:cs typeface="Times New Roman" panose="02020603050405020304" pitchFamily="18" charset="0"/>
+              </a:rPr>
+              <a:t>放在</a:t>
+            </a:r>
+            <a:r>
+              <a:rPr lang="en-US" altLang="zh-CN" dirty="0">
+                <a:solidFill>
+                  <a:srgbClr val="000000"/>
+                </a:solidFill>
+                <a:latin typeface="Times New Roman" panose="02020603050405020304" pitchFamily="18" charset="0"/>
+                <a:ea typeface="华文宋体" panose="02010600040101010101" pitchFamily="2" charset="-122"/>
+                <a:cs typeface="Times New Roman" panose="02020603050405020304" pitchFamily="18" charset="0"/>
+              </a:rPr>
+              <a:t>BAR</a:t>
+            </a:r>
+            <a:r>
+              <a:rPr lang="zh-CN" altLang="en-US" dirty="0">
+                <a:solidFill>
+                  <a:srgbClr val="000000"/>
+                </a:solidFill>
+                <a:latin typeface="Times New Roman" panose="02020603050405020304" pitchFamily="18" charset="0"/>
+                <a:ea typeface="华文宋体" panose="02010600040101010101" pitchFamily="2" charset="-122"/>
+                <a:cs typeface="Times New Roman" panose="02020603050405020304" pitchFamily="18" charset="0"/>
+              </a:rPr>
+              <a:t>空间里，由</a:t>
+            </a:r>
+            <a:r>
+              <a:rPr lang="en-US" altLang="zh-CN" dirty="0">
+                <a:solidFill>
+                  <a:srgbClr val="000000"/>
+                </a:solidFill>
+                <a:latin typeface="Times New Roman" panose="02020603050405020304" pitchFamily="18" charset="0"/>
+                <a:ea typeface="华文宋体" panose="02010600040101010101" pitchFamily="2" charset="-122"/>
+                <a:cs typeface="Times New Roman" panose="02020603050405020304" pitchFamily="18" charset="0"/>
+              </a:rPr>
+              <a:t>Table BIR</a:t>
+            </a:r>
+            <a:r>
+              <a:rPr lang="zh-CN" altLang="en-US" dirty="0">
+                <a:solidFill>
+                  <a:srgbClr val="000000"/>
+                </a:solidFill>
+                <a:latin typeface="Times New Roman" panose="02020603050405020304" pitchFamily="18" charset="0"/>
+                <a:ea typeface="华文宋体" panose="02010600040101010101" pitchFamily="2" charset="-122"/>
+                <a:cs typeface="Times New Roman" panose="02020603050405020304" pitchFamily="18" charset="0"/>
+              </a:rPr>
+              <a:t>和</a:t>
+            </a:r>
+            <a:r>
+              <a:rPr lang="en-US" altLang="zh-CN" dirty="0">
+                <a:solidFill>
+                  <a:srgbClr val="000000"/>
+                </a:solidFill>
+                <a:latin typeface="Times New Roman" panose="02020603050405020304" pitchFamily="18" charset="0"/>
+                <a:ea typeface="华文宋体" panose="02010600040101010101" pitchFamily="2" charset="-122"/>
+                <a:cs typeface="Times New Roman" panose="02020603050405020304" pitchFamily="18" charset="0"/>
+              </a:rPr>
+              <a:t>PBA BIR</a:t>
+            </a:r>
+            <a:r>
+              <a:rPr lang="zh-CN" altLang="en-US" dirty="0">
+                <a:solidFill>
+                  <a:srgbClr val="000000"/>
+                </a:solidFill>
+                <a:latin typeface="Times New Roman" panose="02020603050405020304" pitchFamily="18" charset="0"/>
+                <a:ea typeface="华文宋体" panose="02010600040101010101" pitchFamily="2" charset="-122"/>
+                <a:cs typeface="Times New Roman" panose="02020603050405020304" pitchFamily="18" charset="0"/>
+              </a:rPr>
+              <a:t>指定。</a:t>
+            </a:r>
+            <a:r>
+              <a:rPr lang="en-US" altLang="zh-CN" dirty="0">
+                <a:solidFill>
+                  <a:srgbClr val="000000"/>
+                </a:solidFill>
+                <a:latin typeface="Times New Roman" panose="02020603050405020304" pitchFamily="18" charset="0"/>
+                <a:ea typeface="华文宋体" panose="02010600040101010101" pitchFamily="2" charset="-122"/>
+                <a:cs typeface="Times New Roman" panose="02020603050405020304" pitchFamily="18" charset="0"/>
+              </a:rPr>
+              <a:t>Index</a:t>
+            </a:r>
+            <a:r>
+              <a:rPr lang="zh-CN" altLang="en-US" dirty="0">
+                <a:solidFill>
+                  <a:srgbClr val="000000"/>
+                </a:solidFill>
+                <a:latin typeface="Times New Roman" panose="02020603050405020304" pitchFamily="18" charset="0"/>
+                <a:ea typeface="华文宋体" panose="02010600040101010101" pitchFamily="2" charset="-122"/>
+                <a:cs typeface="Times New Roman" panose="02020603050405020304" pitchFamily="18" charset="0"/>
+              </a:rPr>
+              <a:t>是指向的</a:t>
+            </a:r>
+            <a:r>
+              <a:rPr lang="en-US" altLang="zh-CN" dirty="0">
+                <a:solidFill>
+                  <a:srgbClr val="000000"/>
+                </a:solidFill>
+                <a:latin typeface="Times New Roman" panose="02020603050405020304" pitchFamily="18" charset="0"/>
+                <a:ea typeface="华文宋体" panose="02010600040101010101" pitchFamily="2" charset="-122"/>
+                <a:cs typeface="Times New Roman" panose="02020603050405020304" pitchFamily="18" charset="0"/>
+              </a:rPr>
+              <a:t>BAR-index</a:t>
+            </a:r>
+            <a:endParaRPr lang="zh-CN" altLang="en-US" dirty="0">
+              <a:latin typeface="Times New Roman" panose="02020603050405020304" pitchFamily="18" charset="0"/>
+              <a:ea typeface="华文宋体" panose="02010600040101010101" pitchFamily="2" charset="-122"/>
+              <a:cs typeface="Times New Roman" panose="02020603050405020304" pitchFamily="18" charset="0"/>
+            </a:endParaRPr>
+          </a:p>
+        </p:txBody>
+      </p:sp>
+      <p:pic>
+        <p:nvPicPr>
+          <p:cNvPr id="2050" name="Picture 2" descr="请添加图片描述">
+            <a:extLst>
+              <a:ext uri="{FF2B5EF4-FFF2-40B4-BE49-F238E27FC236}">
+                <a16:creationId xmlns:a16="http://schemas.microsoft.com/office/drawing/2014/main" id="{84943100-B5A9-6141-254C-8775998E07BA}"/>
+              </a:ext>
+            </a:extLst>
+          </p:cNvPr>
+          <p:cNvPicPr>
+            <a:picLocks noChangeAspect="1" noChangeArrowheads="1"/>
+          </p:cNvPicPr>
+          <p:nvPr/>
+        </p:nvPicPr>
+        <p:blipFill>
+          <a:blip r:embed="rId5">
+            <a:extLst>
+              <a:ext uri="{28A0092B-C50C-407E-A947-70E740481C1C}">
+                <a14:useLocalDpi xmlns:a14="http://schemas.microsoft.com/office/drawing/2010/main" val="0"/>
+              </a:ext>
+            </a:extLst>
+          </a:blip>
+          <a:srcRect/>
+          <a:stretch>
+            <a:fillRect/>
+          </a:stretch>
+        </p:blipFill>
+        <p:spPr bwMode="auto">
+          <a:xfrm>
+            <a:off x="5219207" y="4226119"/>
+            <a:ext cx="6972793" cy="2490284"/>
+          </a:xfrm>
+          <a:prstGeom prst="rect">
+            <a:avLst/>
+          </a:prstGeom>
+          <a:noFill/>
+          <a:extLst>
+            <a:ext uri="{909E8E84-426E-40DD-AFC4-6F175D3DCCD1}">
+              <a14:hiddenFill xmlns:a14="http://schemas.microsoft.com/office/drawing/2010/main">
+                <a:solidFill>
+                  <a:srgbClr val="FFFFFF"/>
+                </a:solidFill>
+              </a14:hiddenFill>
+            </a:ext>
+          </a:extLst>
+        </p:spPr>
+      </p:pic>
     </p:spTree>
     <p:extLst>
       <p:ext uri="{BB962C8B-B14F-4D97-AF65-F5344CB8AC3E}">
@@ -7281,6 +7813,125 @@
 </file>
 
 <file path=ppt/slides/slide16.xml><?xml version="1.0" encoding="utf-8"?>
+<p:sld xmlns:a="http://schemas.openxmlformats.org/drawingml/2006/main" xmlns:r="http://schemas.openxmlformats.org/officeDocument/2006/relationships" xmlns:p="http://schemas.openxmlformats.org/presentationml/2006/main">
+  <p:cSld>
+    <p:spTree>
+      <p:nvGrpSpPr>
+        <p:cNvPr id="1" name="">
+          <a:extLst>
+            <a:ext uri="{FF2B5EF4-FFF2-40B4-BE49-F238E27FC236}">
+              <a16:creationId xmlns:a16="http://schemas.microsoft.com/office/drawing/2014/main" id="{5F56CFDB-6BD8-AAD5-E2DB-5131DE8A5892}"/>
+            </a:ext>
+          </a:extLst>
+        </p:cNvPr>
+        <p:cNvGrpSpPr/>
+        <p:nvPr/>
+      </p:nvGrpSpPr>
+      <p:grpSpPr>
+        <a:xfrm>
+          <a:off x="0" y="0"/>
+          <a:ext cx="0" cy="0"/>
+          <a:chOff x="0" y="0"/>
+          <a:chExt cx="0" cy="0"/>
+        </a:xfrm>
+      </p:grpSpPr>
+      <p:pic>
+        <p:nvPicPr>
+          <p:cNvPr id="1026" name="Picture 2">
+            <a:extLst>
+              <a:ext uri="{FF2B5EF4-FFF2-40B4-BE49-F238E27FC236}">
+                <a16:creationId xmlns:a16="http://schemas.microsoft.com/office/drawing/2014/main" id="{DCA2F068-7284-A8B7-53B5-574ADD97294B}"/>
+              </a:ext>
+            </a:extLst>
+          </p:cNvPr>
+          <p:cNvPicPr>
+            <a:picLocks noChangeAspect="1" noChangeArrowheads="1"/>
+          </p:cNvPicPr>
+          <p:nvPr/>
+        </p:nvPicPr>
+        <p:blipFill>
+          <a:blip r:embed="rId2">
+            <a:extLst>
+              <a:ext uri="{28A0092B-C50C-407E-A947-70E740481C1C}">
+                <a14:useLocalDpi xmlns:a14="http://schemas.microsoft.com/office/drawing/2010/main" val="0"/>
+              </a:ext>
+            </a:extLst>
+          </a:blip>
+          <a:srcRect/>
+          <a:stretch>
+            <a:fillRect/>
+          </a:stretch>
+        </p:blipFill>
+        <p:spPr bwMode="auto">
+          <a:xfrm>
+            <a:off x="0" y="0"/>
+            <a:ext cx="12192000" cy="4406900"/>
+          </a:xfrm>
+          <a:prstGeom prst="rect">
+            <a:avLst/>
+          </a:prstGeom>
+          <a:noFill/>
+          <a:extLst>
+            <a:ext uri="{909E8E84-426E-40DD-AFC4-6F175D3DCCD1}">
+              <a14:hiddenFill xmlns:a14="http://schemas.microsoft.com/office/drawing/2010/main">
+                <a:solidFill>
+                  <a:srgbClr val="FFFFFF"/>
+                </a:solidFill>
+              </a14:hiddenFill>
+            </a:ext>
+          </a:extLst>
+        </p:spPr>
+      </p:pic>
+    </p:spTree>
+    <p:extLst>
+      <p:ext uri="{BB962C8B-B14F-4D97-AF65-F5344CB8AC3E}">
+        <p14:creationId xmlns:p14="http://schemas.microsoft.com/office/powerpoint/2010/main" val="3365925423"/>
+      </p:ext>
+    </p:extLst>
+  </p:cSld>
+  <p:clrMapOvr>
+    <a:masterClrMapping/>
+  </p:clrMapOvr>
+</p:sld>
+</file>
+
+<file path=ppt/slides/slide17.xml><?xml version="1.0" encoding="utf-8"?>
+<p:sld xmlns:a="http://schemas.openxmlformats.org/drawingml/2006/main" xmlns:r="http://schemas.openxmlformats.org/officeDocument/2006/relationships" xmlns:p="http://schemas.openxmlformats.org/presentationml/2006/main">
+  <p:cSld>
+    <p:spTree>
+      <p:nvGrpSpPr>
+        <p:cNvPr id="1" name="">
+          <a:extLst>
+            <a:ext uri="{FF2B5EF4-FFF2-40B4-BE49-F238E27FC236}">
+              <a16:creationId xmlns:a16="http://schemas.microsoft.com/office/drawing/2014/main" id="{FB5AB1D0-DA23-F79C-5362-EAC47B6031FA}"/>
+            </a:ext>
+          </a:extLst>
+        </p:cNvPr>
+        <p:cNvGrpSpPr/>
+        <p:nvPr/>
+      </p:nvGrpSpPr>
+      <p:grpSpPr>
+        <a:xfrm>
+          <a:off x="0" y="0"/>
+          <a:ext cx="0" cy="0"/>
+          <a:chOff x="0" y="0"/>
+          <a:chExt cx="0" cy="0"/>
+        </a:xfrm>
+      </p:grpSpPr>
+    </p:spTree>
+    <p:extLst>
+      <p:ext uri="{BB962C8B-B14F-4D97-AF65-F5344CB8AC3E}">
+        <p14:creationId xmlns:p14="http://schemas.microsoft.com/office/powerpoint/2010/main" val="1064859571"/>
+      </p:ext>
+    </p:extLst>
+  </p:cSld>
+  <p:clrMapOvr>
+    <a:masterClrMapping/>
+  </p:clrMapOvr>
+</p:sld>
+</file>
+
+<file path=ppt/slides/slide18.xml><?xml version="1.0" encoding="utf-8"?>
 <p:sld xmlns:a="http://schemas.openxmlformats.org/drawingml/2006/main" xmlns:r="http://schemas.openxmlformats.org/officeDocument/2006/relationships" xmlns:p="http://schemas.openxmlformats.org/presentationml/2006/main">
   <p:cSld>
     <p:spTree>
@@ -7303,6 +7954,1146 @@
           <a:chExt cx="0" cy="0"/>
         </a:xfrm>
       </p:grpSpPr>
+      <p:sp>
+        <p:nvSpPr>
+          <p:cNvPr id="2" name="标题 6">
+            <a:extLst>
+              <a:ext uri="{FF2B5EF4-FFF2-40B4-BE49-F238E27FC236}">
+                <a16:creationId xmlns:a16="http://schemas.microsoft.com/office/drawing/2014/main" id="{49C65CE1-0D4C-C604-C1A5-908A65FE36AC}"/>
+              </a:ext>
+            </a:extLst>
+          </p:cNvPr>
+          <p:cNvSpPr>
+            <a:spLocks noGrp="1"/>
+          </p:cNvSpPr>
+          <p:nvPr>
+            <p:ph type="title"/>
+            <p:custDataLst>
+              <p:tags r:id="rId1"/>
+            </p:custDataLst>
+          </p:nvPr>
+        </p:nvSpPr>
+        <p:spPr>
+          <a:xfrm>
+            <a:off x="107504" y="188640"/>
+            <a:ext cx="8508365" cy="461010"/>
+          </a:xfrm>
+        </p:spPr>
+        <p:txBody>
+          <a:bodyPr>
+            <a:normAutofit fontScale="90000"/>
+          </a:bodyPr>
+          <a:lstStyle/>
+          <a:p>
+            <a:pPr algn="l"/>
+            <a:r>
+              <a:rPr lang="en-US" altLang="zh-CN" sz="3600" dirty="0">
+                <a:gradFill>
+                  <a:gsLst>
+                    <a:gs pos="0">
+                      <a:srgbClr val="E30000"/>
+                    </a:gs>
+                    <a:gs pos="100000">
+                      <a:srgbClr val="760303"/>
+                    </a:gs>
+                  </a:gsLst>
+                  <a:lin scaled="0"/>
+                </a:gradFill>
+              </a:rPr>
+              <a:t>ARI Capability</a:t>
+            </a:r>
+            <a:r>
+              <a:rPr lang="zh-CN" altLang="en-US" sz="3600" dirty="0">
+                <a:gradFill>
+                  <a:gsLst>
+                    <a:gs pos="0">
+                      <a:srgbClr val="E30000"/>
+                    </a:gs>
+                    <a:gs pos="100000">
+                      <a:srgbClr val="760303"/>
+                    </a:gs>
+                  </a:gsLst>
+                  <a:lin scaled="0"/>
+                </a:gradFill>
+              </a:rPr>
+              <a:t>结构</a:t>
+            </a:r>
+          </a:p>
+        </p:txBody>
+      </p:sp>
+      <p:sp>
+        <p:nvSpPr>
+          <p:cNvPr id="3" name="文本框 2">
+            <a:extLst>
+              <a:ext uri="{FF2B5EF4-FFF2-40B4-BE49-F238E27FC236}">
+                <a16:creationId xmlns:a16="http://schemas.microsoft.com/office/drawing/2014/main" id="{BA93BBFF-22F6-6B7E-5C92-78C4298A21BD}"/>
+              </a:ext>
+            </a:extLst>
+          </p:cNvPr>
+          <p:cNvSpPr txBox="1"/>
+          <p:nvPr/>
+        </p:nvSpPr>
+        <p:spPr>
+          <a:xfrm>
+            <a:off x="107503" y="872060"/>
+            <a:ext cx="11656407" cy="2862322"/>
+          </a:xfrm>
+          <a:prstGeom prst="rect">
+            <a:avLst/>
+          </a:prstGeom>
+          <a:noFill/>
+        </p:spPr>
+        <p:txBody>
+          <a:bodyPr wrap="square">
+            <a:spAutoFit/>
+          </a:bodyPr>
+          <a:lstStyle/>
+          <a:p>
+            <a:r>
+              <a:rPr lang="en-US" altLang="zh-CN" dirty="0">
+                <a:latin typeface="Times New Roman" panose="02020603050405020304" pitchFamily="18" charset="0"/>
+                <a:ea typeface="华文宋体" panose="02010600040101010101" pitchFamily="2" charset="-122"/>
+                <a:cs typeface="Times New Roman" panose="02020603050405020304" pitchFamily="18" charset="0"/>
+              </a:rPr>
+              <a:t>ARI: Alternative Routing-ID Interpretation</a:t>
+            </a:r>
+          </a:p>
+          <a:p>
+            <a:r>
+              <a:rPr lang="zh-CN" altLang="en-US" dirty="0">
+                <a:latin typeface="Times New Roman" panose="02020603050405020304" pitchFamily="18" charset="0"/>
+                <a:ea typeface="华文宋体" panose="02010600040101010101" pitchFamily="2" charset="-122"/>
+                <a:cs typeface="Times New Roman" panose="02020603050405020304" pitchFamily="18" charset="0"/>
+              </a:rPr>
+              <a:t>  可替换的</a:t>
+            </a:r>
+            <a:r>
+              <a:rPr lang="en-US" altLang="zh-CN" dirty="0">
+                <a:latin typeface="Times New Roman" panose="02020603050405020304" pitchFamily="18" charset="0"/>
+                <a:ea typeface="华文宋体" panose="02010600040101010101" pitchFamily="2" charset="-122"/>
+                <a:cs typeface="Times New Roman" panose="02020603050405020304" pitchFamily="18" charset="0"/>
+              </a:rPr>
+              <a:t>Routing ID</a:t>
+            </a:r>
+            <a:r>
+              <a:rPr lang="zh-CN" altLang="en-US" dirty="0">
+                <a:latin typeface="Times New Roman" panose="02020603050405020304" pitchFamily="18" charset="0"/>
+                <a:ea typeface="华文宋体" panose="02010600040101010101" pitchFamily="2" charset="-122"/>
+                <a:cs typeface="Times New Roman" panose="02020603050405020304" pitchFamily="18" charset="0"/>
+              </a:rPr>
+              <a:t>，意味着这是一种要把</a:t>
+            </a:r>
+            <a:r>
+              <a:rPr lang="en-US" altLang="zh-CN" dirty="0">
+                <a:latin typeface="Times New Roman" panose="02020603050405020304" pitchFamily="18" charset="0"/>
+                <a:ea typeface="华文宋体" panose="02010600040101010101" pitchFamily="2" charset="-122"/>
+                <a:cs typeface="Times New Roman" panose="02020603050405020304" pitchFamily="18" charset="0"/>
+              </a:rPr>
+              <a:t>Routing ID</a:t>
+            </a:r>
+            <a:r>
+              <a:rPr lang="zh-CN" altLang="en-US" dirty="0">
+                <a:latin typeface="Times New Roman" panose="02020603050405020304" pitchFamily="18" charset="0"/>
+                <a:ea typeface="华文宋体" panose="02010600040101010101" pitchFamily="2" charset="-122"/>
+                <a:cs typeface="Times New Roman" panose="02020603050405020304" pitchFamily="18" charset="0"/>
+              </a:rPr>
+              <a:t>的部分或全部替换掉的机制。通常来讲，</a:t>
+            </a:r>
+            <a:r>
+              <a:rPr lang="en-US" altLang="zh-CN" dirty="0">
+                <a:latin typeface="Times New Roman" panose="02020603050405020304" pitchFamily="18" charset="0"/>
+                <a:ea typeface="华文宋体" panose="02010600040101010101" pitchFamily="2" charset="-122"/>
+                <a:cs typeface="Times New Roman" panose="02020603050405020304" pitchFamily="18" charset="0"/>
+              </a:rPr>
+              <a:t>Requester ID</a:t>
+            </a:r>
+            <a:r>
+              <a:rPr lang="zh-CN" altLang="en-US" dirty="0">
+                <a:latin typeface="Times New Roman" panose="02020603050405020304" pitchFamily="18" charset="0"/>
+                <a:ea typeface="华文宋体" panose="02010600040101010101" pitchFamily="2" charset="-122"/>
+                <a:cs typeface="Times New Roman" panose="02020603050405020304" pitchFamily="18" charset="0"/>
+              </a:rPr>
+              <a:t>和</a:t>
+            </a:r>
+            <a:r>
+              <a:rPr lang="en-US" altLang="zh-CN" dirty="0" err="1">
+                <a:latin typeface="Times New Roman" panose="02020603050405020304" pitchFamily="18" charset="0"/>
+                <a:ea typeface="华文宋体" panose="02010600040101010101" pitchFamily="2" charset="-122"/>
+                <a:cs typeface="Times New Roman" panose="02020603050405020304" pitchFamily="18" charset="0"/>
+              </a:rPr>
+              <a:t>Comleter</a:t>
+            </a:r>
+            <a:r>
+              <a:rPr lang="en-US" altLang="zh-CN" dirty="0">
+                <a:latin typeface="Times New Roman" panose="02020603050405020304" pitchFamily="18" charset="0"/>
+                <a:ea typeface="华文宋体" panose="02010600040101010101" pitchFamily="2" charset="-122"/>
+                <a:cs typeface="Times New Roman" panose="02020603050405020304" pitchFamily="18" charset="0"/>
+              </a:rPr>
+              <a:t> ID</a:t>
+            </a:r>
+            <a:r>
+              <a:rPr lang="zh-CN" altLang="en-US" dirty="0">
+                <a:latin typeface="Times New Roman" panose="02020603050405020304" pitchFamily="18" charset="0"/>
+                <a:ea typeface="华文宋体" panose="02010600040101010101" pitchFamily="2" charset="-122"/>
+                <a:cs typeface="Times New Roman" panose="02020603050405020304" pitchFamily="18" charset="0"/>
+              </a:rPr>
+              <a:t>等</a:t>
+            </a:r>
+            <a:r>
+              <a:rPr lang="en-US" altLang="zh-CN" dirty="0">
+                <a:latin typeface="Times New Roman" panose="02020603050405020304" pitchFamily="18" charset="0"/>
+                <a:ea typeface="华文宋体" panose="02010600040101010101" pitchFamily="2" charset="-122"/>
+                <a:cs typeface="Times New Roman" panose="02020603050405020304" pitchFamily="18" charset="0"/>
+              </a:rPr>
+              <a:t>Routing ID</a:t>
+            </a:r>
+            <a:r>
+              <a:rPr lang="zh-CN" altLang="en-US" dirty="0">
+                <a:latin typeface="Times New Roman" panose="02020603050405020304" pitchFamily="18" charset="0"/>
+                <a:ea typeface="华文宋体" panose="02010600040101010101" pitchFamily="2" charset="-122"/>
+                <a:cs typeface="Times New Roman" panose="02020603050405020304" pitchFamily="18" charset="0"/>
+              </a:rPr>
+              <a:t>由</a:t>
+            </a:r>
+            <a:r>
+              <a:rPr lang="en-US" altLang="zh-CN" dirty="0">
+                <a:latin typeface="Times New Roman" panose="02020603050405020304" pitchFamily="18" charset="0"/>
+                <a:ea typeface="华文宋体" panose="02010600040101010101" pitchFamily="2" charset="-122"/>
+                <a:cs typeface="Times New Roman" panose="02020603050405020304" pitchFamily="18" charset="0"/>
+              </a:rPr>
+              <a:t>Bus Number, Device Number, Function Number (BDF) 3</a:t>
+            </a:r>
+            <a:r>
+              <a:rPr lang="zh-CN" altLang="en-US" dirty="0">
+                <a:latin typeface="Times New Roman" panose="02020603050405020304" pitchFamily="18" charset="0"/>
+                <a:ea typeface="华文宋体" panose="02010600040101010101" pitchFamily="2" charset="-122"/>
+                <a:cs typeface="Times New Roman" panose="02020603050405020304" pitchFamily="18" charset="0"/>
+              </a:rPr>
+              <a:t>个字段组成，其中</a:t>
+            </a:r>
+            <a:r>
+              <a:rPr lang="en-US" altLang="zh-CN" dirty="0">
+                <a:latin typeface="Times New Roman" panose="02020603050405020304" pitchFamily="18" charset="0"/>
+                <a:ea typeface="华文宋体" panose="02010600040101010101" pitchFamily="2" charset="-122"/>
+                <a:cs typeface="Times New Roman" panose="02020603050405020304" pitchFamily="18" charset="0"/>
+              </a:rPr>
+              <a:t>Bus Number 8-bit</a:t>
+            </a:r>
+            <a:r>
+              <a:rPr lang="zh-CN" altLang="en-US" dirty="0">
+                <a:latin typeface="Times New Roman" panose="02020603050405020304" pitchFamily="18" charset="0"/>
+                <a:ea typeface="华文宋体" panose="02010600040101010101" pitchFamily="2" charset="-122"/>
+                <a:cs typeface="Times New Roman" panose="02020603050405020304" pitchFamily="18" charset="0"/>
+              </a:rPr>
+              <a:t>，</a:t>
+            </a:r>
+            <a:r>
+              <a:rPr lang="en-US" altLang="zh-CN" dirty="0">
+                <a:latin typeface="Times New Roman" panose="02020603050405020304" pitchFamily="18" charset="0"/>
+                <a:ea typeface="华文宋体" panose="02010600040101010101" pitchFamily="2" charset="-122"/>
+                <a:cs typeface="Times New Roman" panose="02020603050405020304" pitchFamily="18" charset="0"/>
+              </a:rPr>
+              <a:t>Device Number 5-bit</a:t>
+            </a:r>
+            <a:r>
+              <a:rPr lang="zh-CN" altLang="en-US" dirty="0">
+                <a:latin typeface="Times New Roman" panose="02020603050405020304" pitchFamily="18" charset="0"/>
+                <a:ea typeface="华文宋体" panose="02010600040101010101" pitchFamily="2" charset="-122"/>
+                <a:cs typeface="Times New Roman" panose="02020603050405020304" pitchFamily="18" charset="0"/>
+              </a:rPr>
+              <a:t>，</a:t>
+            </a:r>
+            <a:r>
+              <a:rPr lang="en-US" altLang="zh-CN" dirty="0">
+                <a:latin typeface="Times New Roman" panose="02020603050405020304" pitchFamily="18" charset="0"/>
+                <a:ea typeface="华文宋体" panose="02010600040101010101" pitchFamily="2" charset="-122"/>
+                <a:cs typeface="Times New Roman" panose="02020603050405020304" pitchFamily="18" charset="0"/>
+              </a:rPr>
+              <a:t>Function Number 3-bit</a:t>
+            </a:r>
+            <a:r>
+              <a:rPr lang="zh-CN" altLang="en-US" dirty="0">
+                <a:latin typeface="Times New Roman" panose="02020603050405020304" pitchFamily="18" charset="0"/>
+                <a:ea typeface="华文宋体" panose="02010600040101010101" pitchFamily="2" charset="-122"/>
+                <a:cs typeface="Times New Roman" panose="02020603050405020304" pitchFamily="18" charset="0"/>
+              </a:rPr>
+              <a:t>，一共</a:t>
+            </a:r>
+            <a:r>
+              <a:rPr lang="en-US" altLang="zh-CN" dirty="0">
+                <a:latin typeface="Times New Roman" panose="02020603050405020304" pitchFamily="18" charset="0"/>
+                <a:ea typeface="华文宋体" panose="02010600040101010101" pitchFamily="2" charset="-122"/>
+                <a:cs typeface="Times New Roman" panose="02020603050405020304" pitchFamily="18" charset="0"/>
+              </a:rPr>
+              <a:t>16-bit</a:t>
+            </a:r>
+            <a:r>
+              <a:rPr lang="zh-CN" altLang="en-US" dirty="0">
+                <a:latin typeface="Times New Roman" panose="02020603050405020304" pitchFamily="18" charset="0"/>
+                <a:ea typeface="华文宋体" panose="02010600040101010101" pitchFamily="2" charset="-122"/>
+                <a:cs typeface="Times New Roman" panose="02020603050405020304" pitchFamily="18" charset="0"/>
+              </a:rPr>
+              <a:t>。即最多支持</a:t>
+            </a:r>
+            <a:r>
+              <a:rPr lang="en-US" altLang="zh-CN" dirty="0">
+                <a:latin typeface="Times New Roman" panose="02020603050405020304" pitchFamily="18" charset="0"/>
+                <a:ea typeface="华文宋体" panose="02010600040101010101" pitchFamily="2" charset="-122"/>
+                <a:cs typeface="Times New Roman" panose="02020603050405020304" pitchFamily="18" charset="0"/>
+              </a:rPr>
+              <a:t>256</a:t>
+            </a:r>
+            <a:r>
+              <a:rPr lang="zh-CN" altLang="en-US" dirty="0">
+                <a:latin typeface="Times New Roman" panose="02020603050405020304" pitchFamily="18" charset="0"/>
+                <a:ea typeface="华文宋体" panose="02010600040101010101" pitchFamily="2" charset="-122"/>
+                <a:cs typeface="Times New Roman" panose="02020603050405020304" pitchFamily="18" charset="0"/>
+              </a:rPr>
+              <a:t>个</a:t>
+            </a:r>
+            <a:r>
+              <a:rPr lang="en-US" altLang="zh-CN" dirty="0">
+                <a:latin typeface="Times New Roman" panose="02020603050405020304" pitchFamily="18" charset="0"/>
+                <a:ea typeface="华文宋体" panose="02010600040101010101" pitchFamily="2" charset="-122"/>
+                <a:cs typeface="Times New Roman" panose="02020603050405020304" pitchFamily="18" charset="0"/>
+              </a:rPr>
+              <a:t>Bus</a:t>
+            </a:r>
+            <a:r>
+              <a:rPr lang="zh-CN" altLang="en-US" dirty="0">
+                <a:latin typeface="Times New Roman" panose="02020603050405020304" pitchFamily="18" charset="0"/>
+                <a:ea typeface="华文宋体" panose="02010600040101010101" pitchFamily="2" charset="-122"/>
+                <a:cs typeface="Times New Roman" panose="02020603050405020304" pitchFamily="18" charset="0"/>
+              </a:rPr>
+              <a:t>、</a:t>
+            </a:r>
+            <a:r>
+              <a:rPr lang="en-US" altLang="zh-CN" dirty="0">
+                <a:latin typeface="Times New Roman" panose="02020603050405020304" pitchFamily="18" charset="0"/>
+                <a:ea typeface="华文宋体" panose="02010600040101010101" pitchFamily="2" charset="-122"/>
+                <a:cs typeface="Times New Roman" panose="02020603050405020304" pitchFamily="18" charset="0"/>
+              </a:rPr>
+              <a:t>32</a:t>
+            </a:r>
+            <a:r>
+              <a:rPr lang="zh-CN" altLang="en-US" dirty="0">
+                <a:latin typeface="Times New Roman" panose="02020603050405020304" pitchFamily="18" charset="0"/>
+                <a:ea typeface="华文宋体" panose="02010600040101010101" pitchFamily="2" charset="-122"/>
+                <a:cs typeface="Times New Roman" panose="02020603050405020304" pitchFamily="18" charset="0"/>
+              </a:rPr>
+              <a:t>个</a:t>
+            </a:r>
+            <a:r>
+              <a:rPr lang="en-US" altLang="zh-CN" dirty="0">
+                <a:latin typeface="Times New Roman" panose="02020603050405020304" pitchFamily="18" charset="0"/>
+                <a:ea typeface="华文宋体" panose="02010600040101010101" pitchFamily="2" charset="-122"/>
+                <a:cs typeface="Times New Roman" panose="02020603050405020304" pitchFamily="18" charset="0"/>
+              </a:rPr>
+              <a:t>Device</a:t>
+            </a:r>
+            <a:r>
+              <a:rPr lang="zh-CN" altLang="en-US" dirty="0">
+                <a:latin typeface="Times New Roman" panose="02020603050405020304" pitchFamily="18" charset="0"/>
+                <a:ea typeface="华文宋体" panose="02010600040101010101" pitchFamily="2" charset="-122"/>
+                <a:cs typeface="Times New Roman" panose="02020603050405020304" pitchFamily="18" charset="0"/>
+              </a:rPr>
+              <a:t>及</a:t>
+            </a:r>
+            <a:r>
+              <a:rPr lang="en-US" altLang="zh-CN" dirty="0">
+                <a:latin typeface="Times New Roman" panose="02020603050405020304" pitchFamily="18" charset="0"/>
+                <a:ea typeface="华文宋体" panose="02010600040101010101" pitchFamily="2" charset="-122"/>
+                <a:cs typeface="Times New Roman" panose="02020603050405020304" pitchFamily="18" charset="0"/>
+              </a:rPr>
+              <a:t>8</a:t>
+            </a:r>
+            <a:r>
+              <a:rPr lang="zh-CN" altLang="en-US" dirty="0">
+                <a:latin typeface="Times New Roman" panose="02020603050405020304" pitchFamily="18" charset="0"/>
+                <a:ea typeface="华文宋体" panose="02010600040101010101" pitchFamily="2" charset="-122"/>
+                <a:cs typeface="Times New Roman" panose="02020603050405020304" pitchFamily="18" charset="0"/>
+              </a:rPr>
+              <a:t>个</a:t>
+            </a:r>
+            <a:r>
+              <a:rPr lang="en-US" altLang="zh-CN" dirty="0">
+                <a:latin typeface="Times New Roman" panose="02020603050405020304" pitchFamily="18" charset="0"/>
+                <a:ea typeface="华文宋体" panose="02010600040101010101" pitchFamily="2" charset="-122"/>
+                <a:cs typeface="Times New Roman" panose="02020603050405020304" pitchFamily="18" charset="0"/>
+              </a:rPr>
+              <a:t>Function</a:t>
+            </a:r>
+            <a:r>
+              <a:rPr lang="zh-CN" altLang="en-US" dirty="0">
+                <a:latin typeface="Times New Roman" panose="02020603050405020304" pitchFamily="18" charset="0"/>
+                <a:ea typeface="华文宋体" panose="02010600040101010101" pitchFamily="2" charset="-122"/>
+                <a:cs typeface="Times New Roman" panose="02020603050405020304" pitchFamily="18" charset="0"/>
+              </a:rPr>
+              <a:t>。由于</a:t>
+            </a:r>
+            <a:r>
+              <a:rPr lang="en-US" altLang="zh-CN" dirty="0">
+                <a:latin typeface="Times New Roman" panose="02020603050405020304" pitchFamily="18" charset="0"/>
+                <a:ea typeface="华文宋体" panose="02010600040101010101" pitchFamily="2" charset="-122"/>
+                <a:cs typeface="Times New Roman" panose="02020603050405020304" pitchFamily="18" charset="0"/>
+              </a:rPr>
+              <a:t>PCIe</a:t>
+            </a:r>
+            <a:r>
+              <a:rPr lang="zh-CN" altLang="en-US" dirty="0">
+                <a:latin typeface="Times New Roman" panose="02020603050405020304" pitchFamily="18" charset="0"/>
+                <a:ea typeface="华文宋体" panose="02010600040101010101" pitchFamily="2" charset="-122"/>
+                <a:cs typeface="Times New Roman" panose="02020603050405020304" pitchFamily="18" charset="0"/>
+              </a:rPr>
+              <a:t>采用端到端的传输方式，每一个链路仅挂载一个设备，</a:t>
+            </a:r>
+            <a:r>
+              <a:rPr lang="en-US" altLang="zh-CN" dirty="0">
+                <a:latin typeface="Times New Roman" panose="02020603050405020304" pitchFamily="18" charset="0"/>
+                <a:ea typeface="华文宋体" panose="02010600040101010101" pitchFamily="2" charset="-122"/>
+                <a:cs typeface="Times New Roman" panose="02020603050405020304" pitchFamily="18" charset="0"/>
+              </a:rPr>
+              <a:t>Device</a:t>
+            </a:r>
+            <a:r>
+              <a:rPr lang="zh-CN" altLang="en-US" dirty="0">
+                <a:latin typeface="Times New Roman" panose="02020603050405020304" pitchFamily="18" charset="0"/>
+                <a:ea typeface="华文宋体" panose="02010600040101010101" pitchFamily="2" charset="-122"/>
+                <a:cs typeface="Times New Roman" panose="02020603050405020304" pitchFamily="18" charset="0"/>
+              </a:rPr>
+              <a:t>数量为</a:t>
+            </a:r>
+            <a:r>
+              <a:rPr lang="en-US" altLang="zh-CN" dirty="0">
+                <a:latin typeface="Times New Roman" panose="02020603050405020304" pitchFamily="18" charset="0"/>
+                <a:ea typeface="华文宋体" panose="02010600040101010101" pitchFamily="2" charset="-122"/>
+                <a:cs typeface="Times New Roman" panose="02020603050405020304" pitchFamily="18" charset="0"/>
+              </a:rPr>
+              <a:t>1</a:t>
+            </a:r>
+            <a:r>
+              <a:rPr lang="zh-CN" altLang="en-US" dirty="0">
+                <a:latin typeface="Times New Roman" panose="02020603050405020304" pitchFamily="18" charset="0"/>
+                <a:ea typeface="华文宋体" panose="02010600040101010101" pitchFamily="2" charset="-122"/>
+                <a:cs typeface="Times New Roman" panose="02020603050405020304" pitchFamily="18" charset="0"/>
+              </a:rPr>
+              <a:t>，</a:t>
+            </a:r>
+            <a:r>
+              <a:rPr lang="en-US" altLang="zh-CN" dirty="0">
+                <a:latin typeface="Times New Roman" panose="02020603050405020304" pitchFamily="18" charset="0"/>
+                <a:ea typeface="华文宋体" panose="02010600040101010101" pitchFamily="2" charset="-122"/>
+                <a:cs typeface="Times New Roman" panose="02020603050405020304" pitchFamily="18" charset="0"/>
+              </a:rPr>
+              <a:t>Device Number</a:t>
+            </a:r>
+            <a:r>
+              <a:rPr lang="zh-CN" altLang="en-US" dirty="0">
+                <a:latin typeface="Times New Roman" panose="02020603050405020304" pitchFamily="18" charset="0"/>
+                <a:ea typeface="华文宋体" panose="02010600040101010101" pitchFamily="2" charset="-122"/>
+                <a:cs typeface="Times New Roman" panose="02020603050405020304" pitchFamily="18" charset="0"/>
+              </a:rPr>
+              <a:t>恒为</a:t>
+            </a:r>
+            <a:r>
+              <a:rPr lang="en-US" altLang="zh-CN" dirty="0">
+                <a:latin typeface="Times New Roman" panose="02020603050405020304" pitchFamily="18" charset="0"/>
+                <a:ea typeface="华文宋体" panose="02010600040101010101" pitchFamily="2" charset="-122"/>
+                <a:cs typeface="Times New Roman" panose="02020603050405020304" pitchFamily="18" charset="0"/>
+              </a:rPr>
+              <a:t>0</a:t>
+            </a:r>
+            <a:r>
+              <a:rPr lang="zh-CN" altLang="en-US" dirty="0">
+                <a:latin typeface="Times New Roman" panose="02020603050405020304" pitchFamily="18" charset="0"/>
+                <a:ea typeface="华文宋体" panose="02010600040101010101" pitchFamily="2" charset="-122"/>
+                <a:cs typeface="Times New Roman" panose="02020603050405020304" pitchFamily="18" charset="0"/>
+              </a:rPr>
+              <a:t>，采用</a:t>
+            </a:r>
+            <a:r>
+              <a:rPr lang="en-US" altLang="zh-CN" dirty="0">
+                <a:latin typeface="Times New Roman" panose="02020603050405020304" pitchFamily="18" charset="0"/>
+                <a:ea typeface="华文宋体" panose="02010600040101010101" pitchFamily="2" charset="-122"/>
+                <a:cs typeface="Times New Roman" panose="02020603050405020304" pitchFamily="18" charset="0"/>
+              </a:rPr>
+              <a:t>5-bit</a:t>
+            </a:r>
+            <a:r>
+              <a:rPr lang="zh-CN" altLang="en-US" dirty="0">
+                <a:latin typeface="Times New Roman" panose="02020603050405020304" pitchFamily="18" charset="0"/>
+                <a:ea typeface="华文宋体" panose="02010600040101010101" pitchFamily="2" charset="-122"/>
+                <a:cs typeface="Times New Roman" panose="02020603050405020304" pitchFamily="18" charset="0"/>
+              </a:rPr>
+              <a:t>宽的</a:t>
+            </a:r>
+            <a:r>
+              <a:rPr lang="en-US" altLang="zh-CN" dirty="0">
+                <a:latin typeface="Times New Roman" panose="02020603050405020304" pitchFamily="18" charset="0"/>
+                <a:ea typeface="华文宋体" panose="02010600040101010101" pitchFamily="2" charset="-122"/>
+                <a:cs typeface="Times New Roman" panose="02020603050405020304" pitchFamily="18" charset="0"/>
+              </a:rPr>
+              <a:t>Device Number</a:t>
+            </a:r>
+            <a:r>
+              <a:rPr lang="zh-CN" altLang="en-US" dirty="0">
+                <a:latin typeface="Times New Roman" panose="02020603050405020304" pitchFamily="18" charset="0"/>
+                <a:ea typeface="华文宋体" panose="02010600040101010101" pitchFamily="2" charset="-122"/>
+                <a:cs typeface="Times New Roman" panose="02020603050405020304" pitchFamily="18" charset="0"/>
+              </a:rPr>
+              <a:t>没有意义；此外</a:t>
+            </a:r>
+            <a:r>
+              <a:rPr lang="en-US" altLang="zh-CN" dirty="0">
+                <a:latin typeface="Times New Roman" panose="02020603050405020304" pitchFamily="18" charset="0"/>
+                <a:ea typeface="华文宋体" panose="02010600040101010101" pitchFamily="2" charset="-122"/>
+                <a:cs typeface="Times New Roman" panose="02020603050405020304" pitchFamily="18" charset="0"/>
+              </a:rPr>
+              <a:t>3-bit Function Number</a:t>
+            </a:r>
+            <a:r>
+              <a:rPr lang="zh-CN" altLang="en-US" dirty="0">
+                <a:latin typeface="Times New Roman" panose="02020603050405020304" pitchFamily="18" charset="0"/>
+                <a:ea typeface="华文宋体" panose="02010600040101010101" pitchFamily="2" charset="-122"/>
+                <a:cs typeface="Times New Roman" panose="02020603050405020304" pitchFamily="18" charset="0"/>
+              </a:rPr>
+              <a:t>最高支持</a:t>
+            </a:r>
+            <a:r>
+              <a:rPr lang="en-US" altLang="zh-CN" dirty="0">
+                <a:latin typeface="Times New Roman" panose="02020603050405020304" pitchFamily="18" charset="0"/>
+                <a:ea typeface="华文宋体" panose="02010600040101010101" pitchFamily="2" charset="-122"/>
+                <a:cs typeface="Times New Roman" panose="02020603050405020304" pitchFamily="18" charset="0"/>
+              </a:rPr>
+              <a:t>8</a:t>
+            </a:r>
+            <a:r>
+              <a:rPr lang="zh-CN" altLang="en-US" dirty="0">
+                <a:latin typeface="Times New Roman" panose="02020603050405020304" pitchFamily="18" charset="0"/>
+                <a:ea typeface="华文宋体" panose="02010600040101010101" pitchFamily="2" charset="-122"/>
+                <a:cs typeface="Times New Roman" panose="02020603050405020304" pitchFamily="18" charset="0"/>
+              </a:rPr>
+              <a:t>个</a:t>
+            </a:r>
+            <a:r>
+              <a:rPr lang="en-US" altLang="zh-CN" dirty="0">
+                <a:latin typeface="Times New Roman" panose="02020603050405020304" pitchFamily="18" charset="0"/>
+                <a:ea typeface="华文宋体" panose="02010600040101010101" pitchFamily="2" charset="-122"/>
+                <a:cs typeface="Times New Roman" panose="02020603050405020304" pitchFamily="18" charset="0"/>
+              </a:rPr>
+              <a:t>Function</a:t>
+            </a:r>
+            <a:r>
+              <a:rPr lang="zh-CN" altLang="en-US" dirty="0">
+                <a:latin typeface="Times New Roman" panose="02020603050405020304" pitchFamily="18" charset="0"/>
+                <a:ea typeface="华文宋体" panose="02010600040101010101" pitchFamily="2" charset="-122"/>
+                <a:cs typeface="Times New Roman" panose="02020603050405020304" pitchFamily="18" charset="0"/>
+              </a:rPr>
+              <a:t>，对有多个</a:t>
+            </a:r>
+            <a:r>
+              <a:rPr lang="en-US" altLang="zh-CN" dirty="0">
+                <a:latin typeface="Times New Roman" panose="02020603050405020304" pitchFamily="18" charset="0"/>
+                <a:ea typeface="华文宋体" panose="02010600040101010101" pitchFamily="2" charset="-122"/>
+                <a:cs typeface="Times New Roman" panose="02020603050405020304" pitchFamily="18" charset="0"/>
+              </a:rPr>
+              <a:t>VM</a:t>
+            </a:r>
+            <a:r>
+              <a:rPr lang="zh-CN" altLang="en-US" dirty="0">
+                <a:latin typeface="Times New Roman" panose="02020603050405020304" pitchFamily="18" charset="0"/>
+                <a:ea typeface="华文宋体" panose="02010600040101010101" pitchFamily="2" charset="-122"/>
+                <a:cs typeface="Times New Roman" panose="02020603050405020304" pitchFamily="18" charset="0"/>
+              </a:rPr>
+              <a:t>的</a:t>
+            </a:r>
+            <a:r>
+              <a:rPr lang="en-US" altLang="zh-CN" dirty="0">
+                <a:latin typeface="Times New Roman" panose="02020603050405020304" pitchFamily="18" charset="0"/>
+                <a:ea typeface="华文宋体" panose="02010600040101010101" pitchFamily="2" charset="-122"/>
+                <a:cs typeface="Times New Roman" panose="02020603050405020304" pitchFamily="18" charset="0"/>
+              </a:rPr>
+              <a:t>SR-IOV</a:t>
+            </a:r>
+            <a:r>
+              <a:rPr lang="zh-CN" altLang="en-US" dirty="0">
+                <a:latin typeface="Times New Roman" panose="02020603050405020304" pitchFamily="18" charset="0"/>
+                <a:ea typeface="华文宋体" panose="02010600040101010101" pitchFamily="2" charset="-122"/>
+                <a:cs typeface="Times New Roman" panose="02020603050405020304" pitchFamily="18" charset="0"/>
+              </a:rPr>
+              <a:t>系统而言，</a:t>
+            </a:r>
+            <a:r>
+              <a:rPr lang="en-US" altLang="zh-CN" dirty="0">
+                <a:latin typeface="Times New Roman" panose="02020603050405020304" pitchFamily="18" charset="0"/>
+                <a:ea typeface="华文宋体" panose="02010600040101010101" pitchFamily="2" charset="-122"/>
+                <a:cs typeface="Times New Roman" panose="02020603050405020304" pitchFamily="18" charset="0"/>
+              </a:rPr>
+              <a:t>8</a:t>
+            </a:r>
+            <a:r>
+              <a:rPr lang="zh-CN" altLang="en-US" dirty="0">
+                <a:latin typeface="Times New Roman" panose="02020603050405020304" pitchFamily="18" charset="0"/>
+                <a:ea typeface="华文宋体" panose="02010600040101010101" pitchFamily="2" charset="-122"/>
+                <a:cs typeface="Times New Roman" panose="02020603050405020304" pitchFamily="18" charset="0"/>
+              </a:rPr>
+              <a:t>个</a:t>
+            </a:r>
+            <a:r>
+              <a:rPr lang="en-US" altLang="zh-CN" dirty="0">
+                <a:latin typeface="Times New Roman" panose="02020603050405020304" pitchFamily="18" charset="0"/>
+                <a:ea typeface="华文宋体" panose="02010600040101010101" pitchFamily="2" charset="-122"/>
+                <a:cs typeface="Times New Roman" panose="02020603050405020304" pitchFamily="18" charset="0"/>
+              </a:rPr>
+              <a:t>Function</a:t>
+            </a:r>
+            <a:r>
+              <a:rPr lang="zh-CN" altLang="en-US" dirty="0">
+                <a:latin typeface="Times New Roman" panose="02020603050405020304" pitchFamily="18" charset="0"/>
+                <a:ea typeface="华文宋体" panose="02010600040101010101" pitchFamily="2" charset="-122"/>
+                <a:cs typeface="Times New Roman" panose="02020603050405020304" pitchFamily="18" charset="0"/>
+              </a:rPr>
+              <a:t>稍显不足。  </a:t>
+            </a:r>
+            <a:endParaRPr lang="en-US" altLang="zh-CN" dirty="0">
+              <a:latin typeface="Times New Roman" panose="02020603050405020304" pitchFamily="18" charset="0"/>
+              <a:ea typeface="华文宋体" panose="02010600040101010101" pitchFamily="2" charset="-122"/>
+              <a:cs typeface="Times New Roman" panose="02020603050405020304" pitchFamily="18" charset="0"/>
+            </a:endParaRPr>
+          </a:p>
+          <a:p>
+            <a:r>
+              <a:rPr lang="en-US" altLang="zh-CN" dirty="0">
+                <a:latin typeface="Times New Roman" panose="02020603050405020304" pitchFamily="18" charset="0"/>
+                <a:ea typeface="华文宋体" panose="02010600040101010101" pitchFamily="2" charset="-122"/>
+                <a:cs typeface="Times New Roman" panose="02020603050405020304" pitchFamily="18" charset="0"/>
+              </a:rPr>
+              <a:t>  </a:t>
+            </a:r>
+            <a:r>
+              <a:rPr lang="zh-CN" altLang="en-US" dirty="0">
+                <a:latin typeface="Times New Roman" panose="02020603050405020304" pitchFamily="18" charset="0"/>
+                <a:ea typeface="华文宋体" panose="02010600040101010101" pitchFamily="2" charset="-122"/>
+                <a:cs typeface="Times New Roman" panose="02020603050405020304" pitchFamily="18" charset="0"/>
+              </a:rPr>
+              <a:t>基于以上原因，从</a:t>
+            </a:r>
+            <a:r>
+              <a:rPr lang="en-US" altLang="zh-CN" dirty="0">
+                <a:latin typeface="Times New Roman" panose="02020603050405020304" pitchFamily="18" charset="0"/>
+                <a:ea typeface="华文宋体" panose="02010600040101010101" pitchFamily="2" charset="-122"/>
+                <a:cs typeface="Times New Roman" panose="02020603050405020304" pitchFamily="18" charset="0"/>
+              </a:rPr>
+              <a:t>PCIe Gen3</a:t>
+            </a:r>
+            <a:r>
+              <a:rPr lang="zh-CN" altLang="en-US" dirty="0">
+                <a:latin typeface="Times New Roman" panose="02020603050405020304" pitchFamily="18" charset="0"/>
+                <a:ea typeface="华文宋体" panose="02010600040101010101" pitchFamily="2" charset="-122"/>
+                <a:cs typeface="Times New Roman" panose="02020603050405020304" pitchFamily="18" charset="0"/>
+              </a:rPr>
+              <a:t>开始提供一种</a:t>
+            </a:r>
+            <a:r>
+              <a:rPr lang="en-US" altLang="zh-CN" dirty="0">
+                <a:latin typeface="Times New Roman" panose="02020603050405020304" pitchFamily="18" charset="0"/>
+                <a:ea typeface="华文宋体" panose="02010600040101010101" pitchFamily="2" charset="-122"/>
+                <a:cs typeface="Times New Roman" panose="02020603050405020304" pitchFamily="18" charset="0"/>
+              </a:rPr>
+              <a:t>ARI</a:t>
+            </a:r>
+            <a:r>
+              <a:rPr lang="zh-CN" altLang="en-US" dirty="0">
+                <a:latin typeface="Times New Roman" panose="02020603050405020304" pitchFamily="18" charset="0"/>
+                <a:ea typeface="华文宋体" panose="02010600040101010101" pitchFamily="2" charset="-122"/>
+                <a:cs typeface="Times New Roman" panose="02020603050405020304" pitchFamily="18" charset="0"/>
+              </a:rPr>
+              <a:t>机制，取消了</a:t>
+            </a:r>
+            <a:r>
+              <a:rPr lang="en-US" altLang="zh-CN" dirty="0">
+                <a:latin typeface="Times New Roman" panose="02020603050405020304" pitchFamily="18" charset="0"/>
+                <a:ea typeface="华文宋体" panose="02010600040101010101" pitchFamily="2" charset="-122"/>
+                <a:cs typeface="Times New Roman" panose="02020603050405020304" pitchFamily="18" charset="0"/>
+              </a:rPr>
+              <a:t>Device Number</a:t>
+            </a:r>
+            <a:r>
+              <a:rPr lang="zh-CN" altLang="en-US" dirty="0">
+                <a:latin typeface="Times New Roman" panose="02020603050405020304" pitchFamily="18" charset="0"/>
+                <a:ea typeface="华文宋体" panose="02010600040101010101" pitchFamily="2" charset="-122"/>
+                <a:cs typeface="Times New Roman" panose="02020603050405020304" pitchFamily="18" charset="0"/>
+              </a:rPr>
+              <a:t>字段，合并到</a:t>
+            </a:r>
+            <a:r>
+              <a:rPr lang="en-US" altLang="zh-CN" dirty="0">
+                <a:latin typeface="Times New Roman" panose="02020603050405020304" pitchFamily="18" charset="0"/>
+                <a:ea typeface="华文宋体" panose="02010600040101010101" pitchFamily="2" charset="-122"/>
+                <a:cs typeface="Times New Roman" panose="02020603050405020304" pitchFamily="18" charset="0"/>
+              </a:rPr>
+              <a:t>Function Number</a:t>
+            </a:r>
+            <a:r>
+              <a:rPr lang="zh-CN" altLang="en-US" dirty="0">
+                <a:latin typeface="Times New Roman" panose="02020603050405020304" pitchFamily="18" charset="0"/>
+                <a:ea typeface="华文宋体" panose="02010600040101010101" pitchFamily="2" charset="-122"/>
+                <a:cs typeface="Times New Roman" panose="02020603050405020304" pitchFamily="18" charset="0"/>
+              </a:rPr>
+              <a:t>字段中，这样</a:t>
+            </a:r>
+            <a:r>
+              <a:rPr lang="en-US" altLang="zh-CN" dirty="0">
+                <a:latin typeface="Times New Roman" panose="02020603050405020304" pitchFamily="18" charset="0"/>
+                <a:ea typeface="华文宋体" panose="02010600040101010101" pitchFamily="2" charset="-122"/>
+                <a:cs typeface="Times New Roman" panose="02020603050405020304" pitchFamily="18" charset="0"/>
+              </a:rPr>
+              <a:t>Routing ID</a:t>
+            </a:r>
+            <a:r>
+              <a:rPr lang="zh-CN" altLang="en-US" dirty="0">
+                <a:latin typeface="Times New Roman" panose="02020603050405020304" pitchFamily="18" charset="0"/>
+                <a:ea typeface="华文宋体" panose="02010600040101010101" pitchFamily="2" charset="-122"/>
+                <a:cs typeface="Times New Roman" panose="02020603050405020304" pitchFamily="18" charset="0"/>
+              </a:rPr>
+              <a:t>便变成了</a:t>
+            </a:r>
+            <a:r>
+              <a:rPr lang="en-US" altLang="zh-CN" dirty="0">
+                <a:latin typeface="Times New Roman" panose="02020603050405020304" pitchFamily="18" charset="0"/>
+                <a:ea typeface="华文宋体" panose="02010600040101010101" pitchFamily="2" charset="-122"/>
+                <a:cs typeface="Times New Roman" panose="02020603050405020304" pitchFamily="18" charset="0"/>
+              </a:rPr>
+              <a:t>8-bit Bus Number + 8-bit Function Number</a:t>
+            </a:r>
+            <a:r>
+              <a:rPr lang="zh-CN" altLang="en-US" dirty="0">
+                <a:latin typeface="Times New Roman" panose="02020603050405020304" pitchFamily="18" charset="0"/>
+                <a:ea typeface="华文宋体" panose="02010600040101010101" pitchFamily="2" charset="-122"/>
+                <a:cs typeface="Times New Roman" panose="02020603050405020304" pitchFamily="18" charset="0"/>
+              </a:rPr>
+              <a:t>的格式，最多支持的</a:t>
+            </a:r>
+            <a:r>
+              <a:rPr lang="en-US" altLang="zh-CN" dirty="0">
+                <a:latin typeface="Times New Roman" panose="02020603050405020304" pitchFamily="18" charset="0"/>
+                <a:ea typeface="华文宋体" panose="02010600040101010101" pitchFamily="2" charset="-122"/>
+                <a:cs typeface="Times New Roman" panose="02020603050405020304" pitchFamily="18" charset="0"/>
+              </a:rPr>
+              <a:t>Bus</a:t>
+            </a:r>
+            <a:r>
+              <a:rPr lang="zh-CN" altLang="en-US" dirty="0">
+                <a:latin typeface="Times New Roman" panose="02020603050405020304" pitchFamily="18" charset="0"/>
+                <a:ea typeface="华文宋体" panose="02010600040101010101" pitchFamily="2" charset="-122"/>
+                <a:cs typeface="Times New Roman" panose="02020603050405020304" pitchFamily="18" charset="0"/>
+              </a:rPr>
+              <a:t>数量不变，支持的</a:t>
+            </a:r>
+            <a:r>
+              <a:rPr lang="en-US" altLang="zh-CN" dirty="0">
+                <a:latin typeface="Times New Roman" panose="02020603050405020304" pitchFamily="18" charset="0"/>
+                <a:ea typeface="华文宋体" panose="02010600040101010101" pitchFamily="2" charset="-122"/>
+                <a:cs typeface="Times New Roman" panose="02020603050405020304" pitchFamily="18" charset="0"/>
+              </a:rPr>
+              <a:t>Function</a:t>
+            </a:r>
+            <a:r>
+              <a:rPr lang="zh-CN" altLang="en-US" dirty="0">
+                <a:latin typeface="Times New Roman" panose="02020603050405020304" pitchFamily="18" charset="0"/>
+                <a:ea typeface="华文宋体" panose="02010600040101010101" pitchFamily="2" charset="-122"/>
+                <a:cs typeface="Times New Roman" panose="02020603050405020304" pitchFamily="18" charset="0"/>
+              </a:rPr>
+              <a:t>数量增大到</a:t>
+            </a:r>
+            <a:r>
+              <a:rPr lang="en-US" altLang="zh-CN" dirty="0">
+                <a:latin typeface="Times New Roman" panose="02020603050405020304" pitchFamily="18" charset="0"/>
+                <a:ea typeface="华文宋体" panose="02010600040101010101" pitchFamily="2" charset="-122"/>
+                <a:cs typeface="Times New Roman" panose="02020603050405020304" pitchFamily="18" charset="0"/>
+              </a:rPr>
+              <a:t>256</a:t>
+            </a:r>
+            <a:r>
+              <a:rPr lang="zh-CN" altLang="en-US" dirty="0">
+                <a:latin typeface="Times New Roman" panose="02020603050405020304" pitchFamily="18" charset="0"/>
+                <a:ea typeface="华文宋体" panose="02010600040101010101" pitchFamily="2" charset="-122"/>
+                <a:cs typeface="Times New Roman" panose="02020603050405020304" pitchFamily="18" charset="0"/>
+              </a:rPr>
+              <a:t>个。</a:t>
+            </a:r>
+          </a:p>
+        </p:txBody>
+      </p:sp>
+      <p:pic>
+        <p:nvPicPr>
+          <p:cNvPr id="7" name="Picture 2" descr="图1 ARI Extended Capability">
+            <a:extLst>
+              <a:ext uri="{FF2B5EF4-FFF2-40B4-BE49-F238E27FC236}">
+                <a16:creationId xmlns:a16="http://schemas.microsoft.com/office/drawing/2014/main" id="{63775C2A-CE65-345A-0DC7-6ACF47E6C0B9}"/>
+              </a:ext>
+            </a:extLst>
+          </p:cNvPr>
+          <p:cNvPicPr>
+            <a:picLocks noChangeAspect="1" noChangeArrowheads="1"/>
+          </p:cNvPicPr>
+          <p:nvPr/>
+        </p:nvPicPr>
+        <p:blipFill>
+          <a:blip r:embed="rId3">
+            <a:extLst>
+              <a:ext uri="{28A0092B-C50C-407E-A947-70E740481C1C}">
+                <a14:useLocalDpi xmlns:a14="http://schemas.microsoft.com/office/drawing/2010/main" val="0"/>
+              </a:ext>
+            </a:extLst>
+          </a:blip>
+          <a:srcRect/>
+          <a:stretch>
+            <a:fillRect/>
+          </a:stretch>
+        </p:blipFill>
+        <p:spPr bwMode="auto">
+          <a:xfrm>
+            <a:off x="107503" y="4972587"/>
+            <a:ext cx="12014599" cy="1924050"/>
+          </a:xfrm>
+          <a:prstGeom prst="rect">
+            <a:avLst/>
+          </a:prstGeom>
+          <a:noFill/>
+          <a:extLst>
+            <a:ext uri="{909E8E84-426E-40DD-AFC4-6F175D3DCCD1}">
+              <a14:hiddenFill xmlns:a14="http://schemas.microsoft.com/office/drawing/2010/main">
+                <a:solidFill>
+                  <a:srgbClr val="FFFFFF"/>
+                </a:solidFill>
+              </a14:hiddenFill>
+            </a:ext>
+          </a:extLst>
+        </p:spPr>
+      </p:pic>
+      <p:sp>
+        <p:nvSpPr>
+          <p:cNvPr id="8" name="文本框 7">
+            <a:extLst>
+              <a:ext uri="{FF2B5EF4-FFF2-40B4-BE49-F238E27FC236}">
+                <a16:creationId xmlns:a16="http://schemas.microsoft.com/office/drawing/2014/main" id="{15D6C37E-05E7-4A2B-2A91-AEE751FF8458}"/>
+              </a:ext>
+            </a:extLst>
+          </p:cNvPr>
+          <p:cNvSpPr txBox="1"/>
+          <p:nvPr/>
+        </p:nvSpPr>
+        <p:spPr>
+          <a:xfrm>
+            <a:off x="1441398" y="4049257"/>
+            <a:ext cx="9868704" cy="923330"/>
+          </a:xfrm>
+          <a:prstGeom prst="rect">
+            <a:avLst/>
+          </a:prstGeom>
+          <a:noFill/>
+        </p:spPr>
+        <p:txBody>
+          <a:bodyPr wrap="square">
+            <a:spAutoFit/>
+          </a:bodyPr>
+          <a:lstStyle/>
+          <a:p>
+            <a:r>
+              <a:rPr lang="zh-CN" altLang="en-US" b="0" i="0" dirty="0">
+                <a:solidFill>
+                  <a:srgbClr val="4D4D4D"/>
+                </a:solidFill>
+                <a:effectLst/>
+                <a:latin typeface="-apple-system"/>
+              </a:rPr>
+              <a:t>具备</a:t>
+            </a:r>
+            <a:r>
+              <a:rPr lang="en-US" altLang="zh-CN" b="0" i="0" dirty="0">
+                <a:solidFill>
+                  <a:srgbClr val="4D4D4D"/>
+                </a:solidFill>
+                <a:effectLst/>
+                <a:latin typeface="-apple-system"/>
+              </a:rPr>
+              <a:t>ARI</a:t>
+            </a:r>
+            <a:r>
+              <a:rPr lang="zh-CN" altLang="en-US" b="0" i="0" dirty="0">
+                <a:solidFill>
+                  <a:srgbClr val="4D4D4D"/>
+                </a:solidFill>
+                <a:effectLst/>
+                <a:latin typeface="-apple-system"/>
+              </a:rPr>
+              <a:t>能力的</a:t>
+            </a:r>
+            <a:r>
+              <a:rPr lang="en-US" altLang="zh-CN" b="0" i="0" dirty="0">
+                <a:solidFill>
+                  <a:srgbClr val="4D4D4D"/>
+                </a:solidFill>
+                <a:effectLst/>
+                <a:latin typeface="-apple-system"/>
+              </a:rPr>
+              <a:t>PCIe</a:t>
+            </a:r>
+            <a:r>
+              <a:rPr lang="zh-CN" altLang="en-US" b="0" i="0" dirty="0">
+                <a:solidFill>
+                  <a:srgbClr val="4D4D4D"/>
+                </a:solidFill>
+                <a:effectLst/>
+                <a:latin typeface="-apple-system"/>
+              </a:rPr>
+              <a:t>设备需实现</a:t>
+            </a:r>
+            <a:r>
+              <a:rPr lang="en-US" altLang="zh-CN" b="0" i="0" dirty="0">
+                <a:solidFill>
+                  <a:srgbClr val="4D4D4D"/>
+                </a:solidFill>
+                <a:effectLst/>
+                <a:latin typeface="-apple-system"/>
+              </a:rPr>
+              <a:t>ARI</a:t>
+            </a:r>
+            <a:r>
+              <a:rPr lang="zh-CN" altLang="en-US" b="0" i="0" dirty="0">
+                <a:solidFill>
+                  <a:srgbClr val="4D4D4D"/>
+                </a:solidFill>
+                <a:effectLst/>
+                <a:latin typeface="-apple-system"/>
+              </a:rPr>
+              <a:t>扩展能力结构。</a:t>
+            </a:r>
+            <a:r>
+              <a:rPr lang="en-US" altLang="zh-CN" b="0" i="0" dirty="0">
+                <a:solidFill>
+                  <a:srgbClr val="4D4D4D"/>
+                </a:solidFill>
+                <a:effectLst/>
+                <a:latin typeface="-apple-system"/>
+              </a:rPr>
+              <a:t>ARI</a:t>
+            </a:r>
+            <a:r>
+              <a:rPr lang="zh-CN" altLang="en-US" b="0" i="0" dirty="0">
+                <a:solidFill>
+                  <a:srgbClr val="4D4D4D"/>
+                </a:solidFill>
+                <a:effectLst/>
+                <a:latin typeface="-apple-system"/>
+              </a:rPr>
+              <a:t>扩展能力结构如下图图</a:t>
+            </a:r>
+            <a:r>
+              <a:rPr lang="en-US" altLang="zh-CN" b="0" i="0" dirty="0">
+                <a:solidFill>
+                  <a:srgbClr val="4D4D4D"/>
+                </a:solidFill>
+                <a:effectLst/>
+                <a:latin typeface="-apple-system"/>
+              </a:rPr>
+              <a:t>1</a:t>
+            </a:r>
+            <a:r>
+              <a:rPr lang="zh-CN" altLang="en-US" b="0" i="0" dirty="0">
+                <a:solidFill>
+                  <a:srgbClr val="4D4D4D"/>
+                </a:solidFill>
+                <a:effectLst/>
+                <a:latin typeface="-apple-system"/>
+              </a:rPr>
+              <a:t>所示，有</a:t>
+            </a:r>
+            <a:r>
+              <a:rPr lang="en-US" altLang="zh-CN" b="0" i="0" dirty="0">
+                <a:solidFill>
+                  <a:srgbClr val="4D4D4D"/>
+                </a:solidFill>
+                <a:effectLst/>
+                <a:latin typeface="-apple-system"/>
+              </a:rPr>
+              <a:t>ARI</a:t>
+            </a:r>
+            <a:r>
+              <a:rPr lang="zh-CN" altLang="en-US" b="0" i="0" dirty="0">
+                <a:solidFill>
+                  <a:srgbClr val="4D4D4D"/>
+                </a:solidFill>
+                <a:effectLst/>
+                <a:latin typeface="-apple-system"/>
+              </a:rPr>
+              <a:t>扩展能力头标、</a:t>
+            </a:r>
+            <a:r>
+              <a:rPr lang="en-US" altLang="zh-CN" b="0" i="0" dirty="0">
+                <a:solidFill>
+                  <a:srgbClr val="4D4D4D"/>
+                </a:solidFill>
+                <a:effectLst/>
+                <a:latin typeface="-apple-system"/>
+              </a:rPr>
+              <a:t>ARI</a:t>
+            </a:r>
+            <a:r>
+              <a:rPr lang="zh-CN" altLang="en-US" b="0" i="0" dirty="0">
+                <a:solidFill>
+                  <a:srgbClr val="4D4D4D"/>
+                </a:solidFill>
+                <a:effectLst/>
+                <a:latin typeface="-apple-system"/>
+              </a:rPr>
+              <a:t>控制寄存器、</a:t>
+            </a:r>
+            <a:r>
+              <a:rPr lang="en-US" altLang="zh-CN" b="0" i="0" dirty="0">
+                <a:solidFill>
+                  <a:srgbClr val="4D4D4D"/>
+                </a:solidFill>
+                <a:effectLst/>
+                <a:latin typeface="-apple-system"/>
+              </a:rPr>
+              <a:t>ARI</a:t>
+            </a:r>
+            <a:r>
+              <a:rPr lang="zh-CN" altLang="en-US" b="0" i="0" dirty="0">
+                <a:solidFill>
+                  <a:srgbClr val="4D4D4D"/>
+                </a:solidFill>
+                <a:effectLst/>
+                <a:latin typeface="-apple-system"/>
+              </a:rPr>
+              <a:t>能力寄存器三部分。以下</a:t>
+            </a:r>
+            <a:r>
+              <a:rPr lang="en-US" altLang="zh-CN" b="0" i="0" dirty="0">
+                <a:solidFill>
+                  <a:srgbClr val="4D4D4D"/>
+                </a:solidFill>
+                <a:effectLst/>
+                <a:latin typeface="-apple-system"/>
+              </a:rPr>
+              <a:t>ARI</a:t>
+            </a:r>
+            <a:r>
+              <a:rPr lang="zh-CN" altLang="en-US" b="0" i="0" dirty="0">
+                <a:solidFill>
+                  <a:srgbClr val="4D4D4D"/>
+                </a:solidFill>
+                <a:effectLst/>
+                <a:latin typeface="-apple-system"/>
+              </a:rPr>
+              <a:t>扩展能力结构仅适用于</a:t>
+            </a:r>
+            <a:r>
+              <a:rPr lang="en-US" altLang="zh-CN" b="0" i="0" dirty="0">
+                <a:solidFill>
+                  <a:srgbClr val="4D4D4D"/>
+                </a:solidFill>
+                <a:effectLst/>
+                <a:latin typeface="-apple-system"/>
+              </a:rPr>
+              <a:t>Device</a:t>
+            </a:r>
+            <a:r>
+              <a:rPr lang="zh-CN" altLang="en-US" b="0" i="0" dirty="0">
+                <a:solidFill>
+                  <a:srgbClr val="4D4D4D"/>
+                </a:solidFill>
+                <a:effectLst/>
+                <a:latin typeface="-apple-system"/>
+              </a:rPr>
+              <a:t>，不适用于</a:t>
+            </a:r>
+            <a:r>
+              <a:rPr lang="en-US" altLang="zh-CN" b="0" i="0" dirty="0">
+                <a:solidFill>
+                  <a:srgbClr val="4D4D4D"/>
+                </a:solidFill>
+                <a:effectLst/>
+                <a:latin typeface="-apple-system"/>
+              </a:rPr>
+              <a:t>RP</a:t>
+            </a:r>
+            <a:r>
+              <a:rPr lang="zh-CN" altLang="en-US" b="0" i="0" dirty="0">
+                <a:solidFill>
+                  <a:srgbClr val="4D4D4D"/>
+                </a:solidFill>
+                <a:effectLst/>
+                <a:latin typeface="-apple-system"/>
+              </a:rPr>
+              <a:t>、</a:t>
+            </a:r>
+            <a:r>
+              <a:rPr lang="en-US" altLang="zh-CN" b="0" i="0" dirty="0">
+                <a:solidFill>
+                  <a:srgbClr val="4D4D4D"/>
+                </a:solidFill>
+                <a:effectLst/>
+                <a:latin typeface="-apple-system"/>
+              </a:rPr>
+              <a:t>Switch</a:t>
+            </a:r>
+            <a:r>
+              <a:rPr lang="zh-CN" altLang="en-US" b="0" i="0" dirty="0">
+                <a:solidFill>
+                  <a:srgbClr val="4D4D4D"/>
+                </a:solidFill>
+                <a:effectLst/>
+                <a:latin typeface="-apple-system"/>
+              </a:rPr>
+              <a:t>下行端口、</a:t>
+            </a:r>
+            <a:r>
+              <a:rPr lang="en-US" altLang="zh-CN" b="0" i="0" dirty="0" err="1">
+                <a:solidFill>
+                  <a:srgbClr val="4D4D4D"/>
+                </a:solidFill>
+                <a:effectLst/>
+                <a:latin typeface="-apple-system"/>
+              </a:rPr>
+              <a:t>RCiEP</a:t>
+            </a:r>
+            <a:r>
+              <a:rPr lang="zh-CN" altLang="en-US" b="0" i="0" dirty="0">
+                <a:solidFill>
+                  <a:srgbClr val="4D4D4D"/>
+                </a:solidFill>
+                <a:effectLst/>
+                <a:latin typeface="-apple-system"/>
+              </a:rPr>
+              <a:t>、</a:t>
+            </a:r>
+            <a:r>
+              <a:rPr lang="en-US" altLang="zh-CN" b="0" i="0" dirty="0">
+                <a:solidFill>
+                  <a:srgbClr val="4D4D4D"/>
+                </a:solidFill>
+                <a:effectLst/>
+                <a:latin typeface="-apple-system"/>
+              </a:rPr>
+              <a:t>RC</a:t>
+            </a:r>
+            <a:r>
+              <a:rPr lang="zh-CN" altLang="en-US" b="0" i="0" dirty="0">
+                <a:solidFill>
+                  <a:srgbClr val="4D4D4D"/>
+                </a:solidFill>
+                <a:effectLst/>
+                <a:latin typeface="-apple-system"/>
+              </a:rPr>
+              <a:t>事件收集器等。</a:t>
+            </a:r>
+            <a:endParaRPr lang="zh-CN" altLang="en-US" dirty="0"/>
+          </a:p>
+        </p:txBody>
+      </p:sp>
     </p:spTree>
     <p:extLst>
       <p:ext uri="{BB962C8B-B14F-4D97-AF65-F5344CB8AC3E}">
@@ -7316,7 +9107,7 @@
 </p:sld>
 </file>
 
-<file path=ppt/slides/slide17.xml><?xml version="1.0" encoding="utf-8"?>
+<file path=ppt/slides/slide19.xml><?xml version="1.0" encoding="utf-8"?>
 <p:sld xmlns:a="http://schemas.openxmlformats.org/drawingml/2006/main" xmlns:r="http://schemas.openxmlformats.org/officeDocument/2006/relationships" xmlns:p="http://schemas.openxmlformats.org/presentationml/2006/main">
   <p:cSld>
     <p:spTree>
@@ -7324,7 +9115,7 @@
         <p:cNvPr id="1" name="">
           <a:extLst>
             <a:ext uri="{FF2B5EF4-FFF2-40B4-BE49-F238E27FC236}">
-              <a16:creationId xmlns:a16="http://schemas.microsoft.com/office/drawing/2014/main" id="{EC0B666D-5988-119A-27AD-86F2B6F0683E}"/>
+              <a16:creationId xmlns:a16="http://schemas.microsoft.com/office/drawing/2014/main" id="{12FC32AD-303C-F7F6-CC8B-CE5C1550732E}"/>
             </a:ext>
           </a:extLst>
         </p:cNvPr>
@@ -7339,10 +9130,95 @@
           <a:chExt cx="0" cy="0"/>
         </a:xfrm>
       </p:grpSpPr>
+      <p:sp>
+        <p:nvSpPr>
+          <p:cNvPr id="9" name="文本框 8">
+            <a:extLst>
+              <a:ext uri="{FF2B5EF4-FFF2-40B4-BE49-F238E27FC236}">
+                <a16:creationId xmlns:a16="http://schemas.microsoft.com/office/drawing/2014/main" id="{D265B886-DE41-0FCA-3723-5BB50DB28DA2}"/>
+              </a:ext>
+            </a:extLst>
+          </p:cNvPr>
+          <p:cNvSpPr txBox="1"/>
+          <p:nvPr/>
+        </p:nvSpPr>
+        <p:spPr>
+          <a:xfrm>
+            <a:off x="467269" y="3244334"/>
+            <a:ext cx="11257461" cy="369332"/>
+          </a:xfrm>
+          <a:prstGeom prst="rect">
+            <a:avLst/>
+          </a:prstGeom>
+          <a:noFill/>
+        </p:spPr>
+        <p:txBody>
+          <a:bodyPr wrap="square">
+            <a:spAutoFit/>
+          </a:bodyPr>
+          <a:lstStyle/>
+          <a:p>
+            <a:r>
+              <a:rPr lang="en-US" altLang="zh-CN" dirty="0"/>
+              <a:t>ARI Extend Capability Header: ARI</a:t>
+            </a:r>
+            <a:r>
+              <a:rPr lang="zh-CN" altLang="en-US" dirty="0"/>
+              <a:t>扩展能力头，用于指示该设备具备</a:t>
+            </a:r>
+            <a:r>
+              <a:rPr lang="en-US" altLang="zh-CN" dirty="0"/>
+              <a:t>ARI</a:t>
+            </a:r>
+            <a:r>
+              <a:rPr lang="zh-CN" altLang="en-US" dirty="0"/>
+              <a:t>能力、</a:t>
+            </a:r>
+            <a:r>
+              <a:rPr lang="en-US" altLang="zh-CN" dirty="0"/>
+              <a:t>ARI</a:t>
+            </a:r>
+            <a:r>
+              <a:rPr lang="zh-CN" altLang="en-US" dirty="0"/>
+              <a:t>能力版本以及下一能力偏移</a:t>
+            </a:r>
+          </a:p>
+        </p:txBody>
+      </p:sp>
+      <p:pic>
+        <p:nvPicPr>
+          <p:cNvPr id="14" name="图片 13">
+            <a:extLst>
+              <a:ext uri="{FF2B5EF4-FFF2-40B4-BE49-F238E27FC236}">
+                <a16:creationId xmlns:a16="http://schemas.microsoft.com/office/drawing/2014/main" id="{56A494B5-C5DF-EC20-2E1C-F30ECDCB97A2}"/>
+              </a:ext>
+            </a:extLst>
+          </p:cNvPr>
+          <p:cNvPicPr>
+            <a:picLocks noChangeAspect="1"/>
+          </p:cNvPicPr>
+          <p:nvPr/>
+        </p:nvPicPr>
+        <p:blipFill>
+          <a:blip r:embed="rId2"/>
+          <a:stretch>
+            <a:fillRect/>
+          </a:stretch>
+        </p:blipFill>
+        <p:spPr>
+          <a:xfrm>
+            <a:off x="1035075" y="331580"/>
+            <a:ext cx="10409524" cy="2695238"/>
+          </a:xfrm>
+          <a:prstGeom prst="rect">
+            <a:avLst/>
+          </a:prstGeom>
+        </p:spPr>
+      </p:pic>
     </p:spTree>
     <p:extLst>
       <p:ext uri="{BB962C8B-B14F-4D97-AF65-F5344CB8AC3E}">
-        <p14:creationId xmlns:p14="http://schemas.microsoft.com/office/powerpoint/2010/main" val="2044740292"/>
+        <p14:creationId xmlns:p14="http://schemas.microsoft.com/office/powerpoint/2010/main" val="2812758863"/>
       </p:ext>
     </p:extLst>
   </p:cSld>
@@ -7403,6 +9279,709 @@
     <p:extLst>
       <p:ext uri="{BB962C8B-B14F-4D97-AF65-F5344CB8AC3E}">
         <p14:creationId xmlns:p14="http://schemas.microsoft.com/office/powerpoint/2010/main" val="2747703643"/>
+      </p:ext>
+    </p:extLst>
+  </p:cSld>
+  <p:clrMapOvr>
+    <a:masterClrMapping/>
+  </p:clrMapOvr>
+</p:sld>
+</file>
+
+<file path=ppt/slides/slide20.xml><?xml version="1.0" encoding="utf-8"?>
+<p:sld xmlns:a="http://schemas.openxmlformats.org/drawingml/2006/main" xmlns:r="http://schemas.openxmlformats.org/officeDocument/2006/relationships" xmlns:p="http://schemas.openxmlformats.org/presentationml/2006/main">
+  <p:cSld>
+    <p:spTree>
+      <p:nvGrpSpPr>
+        <p:cNvPr id="1" name="">
+          <a:extLst>
+            <a:ext uri="{FF2B5EF4-FFF2-40B4-BE49-F238E27FC236}">
+              <a16:creationId xmlns:a16="http://schemas.microsoft.com/office/drawing/2014/main" id="{624FAA5A-7C3B-54D9-61D7-8D546C9FE7C8}"/>
+            </a:ext>
+          </a:extLst>
+        </p:cNvPr>
+        <p:cNvGrpSpPr/>
+        <p:nvPr/>
+      </p:nvGrpSpPr>
+      <p:grpSpPr>
+        <a:xfrm>
+          <a:off x="0" y="0"/>
+          <a:ext cx="0" cy="0"/>
+          <a:chOff x="0" y="0"/>
+          <a:chExt cx="0" cy="0"/>
+        </a:xfrm>
+      </p:grpSpPr>
+      <p:pic>
+        <p:nvPicPr>
+          <p:cNvPr id="12" name="图片 11">
+            <a:extLst>
+              <a:ext uri="{FF2B5EF4-FFF2-40B4-BE49-F238E27FC236}">
+                <a16:creationId xmlns:a16="http://schemas.microsoft.com/office/drawing/2014/main" id="{98618B84-3682-1EF3-E4C2-BD825452B344}"/>
+              </a:ext>
+            </a:extLst>
+          </p:cNvPr>
+          <p:cNvPicPr>
+            <a:picLocks noChangeAspect="1"/>
+          </p:cNvPicPr>
+          <p:nvPr/>
+        </p:nvPicPr>
+        <p:blipFill>
+          <a:blip r:embed="rId2"/>
+          <a:stretch>
+            <a:fillRect/>
+          </a:stretch>
+        </p:blipFill>
+        <p:spPr>
+          <a:xfrm>
+            <a:off x="2430321" y="109290"/>
+            <a:ext cx="7331357" cy="2997514"/>
+          </a:xfrm>
+          <a:prstGeom prst="rect">
+            <a:avLst/>
+          </a:prstGeom>
+        </p:spPr>
+      </p:pic>
+      <p:sp>
+        <p:nvSpPr>
+          <p:cNvPr id="4" name="文本框 3">
+            <a:extLst>
+              <a:ext uri="{FF2B5EF4-FFF2-40B4-BE49-F238E27FC236}">
+                <a16:creationId xmlns:a16="http://schemas.microsoft.com/office/drawing/2014/main" id="{CEC1BEAB-A9E1-445D-3032-1A670F72A886}"/>
+              </a:ext>
+            </a:extLst>
+          </p:cNvPr>
+          <p:cNvSpPr txBox="1"/>
+          <p:nvPr/>
+        </p:nvSpPr>
+        <p:spPr>
+          <a:xfrm>
+            <a:off x="467268" y="3106804"/>
+            <a:ext cx="11399384" cy="2031325"/>
+          </a:xfrm>
+          <a:prstGeom prst="rect">
+            <a:avLst/>
+          </a:prstGeom>
+          <a:noFill/>
+        </p:spPr>
+        <p:txBody>
+          <a:bodyPr wrap="square">
+            <a:spAutoFit/>
+          </a:bodyPr>
+          <a:lstStyle/>
+          <a:p>
+            <a:r>
+              <a:rPr lang="en-US" altLang="zh-CN" dirty="0"/>
+              <a:t>ARI Capability</a:t>
+            </a:r>
+            <a:r>
+              <a:rPr lang="zh-CN" altLang="en-US" dirty="0"/>
+              <a:t>寄存器：</a:t>
+            </a:r>
+            <a:r>
+              <a:rPr lang="en-US" altLang="zh-CN" dirty="0"/>
+              <a:t>ARI</a:t>
+            </a:r>
+            <a:r>
+              <a:rPr lang="zh-CN" altLang="en-US" dirty="0"/>
+              <a:t>能力寄存器</a:t>
+            </a:r>
+            <a:endParaRPr lang="en-US" altLang="zh-CN" dirty="0"/>
+          </a:p>
+          <a:p>
+            <a:r>
+              <a:rPr lang="en-US" altLang="zh-CN" dirty="0"/>
+              <a:t>	MFVC(multi-function VC) Function Groups capability</a:t>
+            </a:r>
+            <a:r>
+              <a:rPr lang="zh-CN" altLang="en-US" dirty="0"/>
+              <a:t>用以指示具备</a:t>
+            </a:r>
+            <a:r>
+              <a:rPr lang="en-US" altLang="zh-CN" dirty="0"/>
+              <a:t>MFVC</a:t>
+            </a:r>
+            <a:r>
+              <a:rPr lang="zh-CN" altLang="en-US" dirty="0"/>
+              <a:t>能力的</a:t>
+            </a:r>
+            <a:r>
+              <a:rPr lang="en-US" altLang="zh-CN" dirty="0"/>
+              <a:t>ARI</a:t>
+            </a:r>
+            <a:r>
+              <a:rPr lang="zh-CN" altLang="en-US" dirty="0"/>
+              <a:t>设备是否支持</a:t>
+            </a:r>
+            <a:r>
+              <a:rPr lang="en-US" altLang="zh-CN" dirty="0"/>
+              <a:t>Function Group</a:t>
+            </a:r>
+            <a:r>
+              <a:rPr lang="zh-CN" altLang="en-US" dirty="0"/>
+              <a:t>粒度的仲裁</a:t>
+            </a:r>
+            <a:endParaRPr lang="en-US" altLang="zh-CN" dirty="0"/>
+          </a:p>
+          <a:p>
+            <a:r>
+              <a:rPr lang="en-US" altLang="zh-CN" dirty="0"/>
+              <a:t>	ACS Function Groups capability</a:t>
+            </a:r>
+            <a:r>
+              <a:rPr lang="zh-CN" altLang="en-US" dirty="0"/>
+              <a:t>用以指示具备</a:t>
+            </a:r>
+            <a:r>
+              <a:rPr lang="en-US" altLang="zh-CN" dirty="0"/>
+              <a:t>ACS P2P</a:t>
+            </a:r>
+            <a:r>
+              <a:rPr lang="zh-CN" altLang="en-US" dirty="0"/>
+              <a:t>出口控制的</a:t>
+            </a:r>
+            <a:r>
+              <a:rPr lang="en-US" altLang="zh-CN" dirty="0"/>
+              <a:t>ARI</a:t>
+            </a:r>
+            <a:r>
+              <a:rPr lang="zh-CN" altLang="en-US" dirty="0"/>
+              <a:t>设备是否支持</a:t>
+            </a:r>
+            <a:r>
+              <a:rPr lang="en-US" altLang="zh-CN" dirty="0"/>
+              <a:t>Function Group</a:t>
+            </a:r>
+            <a:r>
+              <a:rPr lang="zh-CN" altLang="en-US" dirty="0"/>
+              <a:t>粒度的访问。</a:t>
+            </a:r>
+            <a:endParaRPr lang="en-US" altLang="zh-CN" dirty="0"/>
+          </a:p>
+          <a:p>
+            <a:r>
+              <a:rPr lang="en-US" altLang="zh-CN" dirty="0"/>
+              <a:t>	</a:t>
+            </a:r>
+            <a:r>
+              <a:rPr lang="zh-CN" altLang="en-US" dirty="0"/>
+              <a:t>这两个字段引用与</a:t>
+            </a:r>
+            <a:r>
+              <a:rPr lang="en-US" altLang="zh-CN" dirty="0"/>
+              <a:t>Function0,</a:t>
+            </a:r>
+            <a:r>
+              <a:rPr lang="zh-CN" altLang="en-US" dirty="0"/>
+              <a:t>其余</a:t>
+            </a:r>
+            <a:r>
+              <a:rPr lang="en-US" altLang="zh-CN" dirty="0"/>
+              <a:t>Function</a:t>
+            </a:r>
+            <a:r>
+              <a:rPr lang="zh-CN" altLang="en-US" dirty="0"/>
+              <a:t>该字段置零。</a:t>
+            </a:r>
+            <a:endParaRPr lang="en-US" altLang="zh-CN" dirty="0"/>
+          </a:p>
+          <a:p>
+            <a:r>
+              <a:rPr lang="en-US" altLang="zh-CN" dirty="0"/>
+              <a:t>	Next Function Number</a:t>
+            </a:r>
+            <a:r>
+              <a:rPr lang="zh-CN" altLang="en-US" dirty="0"/>
+              <a:t>用以指示该</a:t>
+            </a:r>
+            <a:r>
+              <a:rPr lang="en-US" altLang="zh-CN" dirty="0"/>
+              <a:t>Device</a:t>
+            </a:r>
+            <a:r>
+              <a:rPr lang="zh-CN" altLang="en-US" dirty="0"/>
+              <a:t>中的下一</a:t>
+            </a:r>
+            <a:r>
+              <a:rPr lang="en-US" altLang="zh-CN" dirty="0"/>
+              <a:t>Function Number</a:t>
+            </a:r>
+            <a:r>
+              <a:rPr lang="zh-CN" altLang="en-US" dirty="0"/>
+              <a:t>。若没有则置零</a:t>
+            </a:r>
+          </a:p>
+        </p:txBody>
+      </p:sp>
+    </p:spTree>
+    <p:extLst>
+      <p:ext uri="{BB962C8B-B14F-4D97-AF65-F5344CB8AC3E}">
+        <p14:creationId xmlns:p14="http://schemas.microsoft.com/office/powerpoint/2010/main" val="1257420046"/>
+      </p:ext>
+    </p:extLst>
+  </p:cSld>
+  <p:clrMapOvr>
+    <a:masterClrMapping/>
+  </p:clrMapOvr>
+</p:sld>
+</file>
+
+<file path=ppt/slides/slide21.xml><?xml version="1.0" encoding="utf-8"?>
+<p:sld xmlns:a="http://schemas.openxmlformats.org/drawingml/2006/main" xmlns:r="http://schemas.openxmlformats.org/officeDocument/2006/relationships" xmlns:p="http://schemas.openxmlformats.org/presentationml/2006/main">
+  <p:cSld>
+    <p:spTree>
+      <p:nvGrpSpPr>
+        <p:cNvPr id="1" name="">
+          <a:extLst>
+            <a:ext uri="{FF2B5EF4-FFF2-40B4-BE49-F238E27FC236}">
+              <a16:creationId xmlns:a16="http://schemas.microsoft.com/office/drawing/2014/main" id="{116302A9-C69F-77DE-C98B-1BEBDF3C7042}"/>
+            </a:ext>
+          </a:extLst>
+        </p:cNvPr>
+        <p:cNvGrpSpPr/>
+        <p:nvPr/>
+      </p:nvGrpSpPr>
+      <p:grpSpPr>
+        <a:xfrm>
+          <a:off x="0" y="0"/>
+          <a:ext cx="0" cy="0"/>
+          <a:chOff x="0" y="0"/>
+          <a:chExt cx="0" cy="0"/>
+        </a:xfrm>
+      </p:grpSpPr>
+      <p:pic>
+        <p:nvPicPr>
+          <p:cNvPr id="3" name="图片 2">
+            <a:extLst>
+              <a:ext uri="{FF2B5EF4-FFF2-40B4-BE49-F238E27FC236}">
+                <a16:creationId xmlns:a16="http://schemas.microsoft.com/office/drawing/2014/main" id="{84CBC7AD-DA42-456A-2264-0DBBFA2E7E8C}"/>
+              </a:ext>
+            </a:extLst>
+          </p:cNvPr>
+          <p:cNvPicPr>
+            <a:picLocks noChangeAspect="1"/>
+          </p:cNvPicPr>
+          <p:nvPr/>
+        </p:nvPicPr>
+        <p:blipFill>
+          <a:blip r:embed="rId2"/>
+          <a:stretch>
+            <a:fillRect/>
+          </a:stretch>
+        </p:blipFill>
+        <p:spPr>
+          <a:xfrm>
+            <a:off x="1600762" y="0"/>
+            <a:ext cx="8990476" cy="3980952"/>
+          </a:xfrm>
+          <a:prstGeom prst="rect">
+            <a:avLst/>
+          </a:prstGeom>
+        </p:spPr>
+      </p:pic>
+      <p:sp>
+        <p:nvSpPr>
+          <p:cNvPr id="4" name="文本框 3">
+            <a:extLst>
+              <a:ext uri="{FF2B5EF4-FFF2-40B4-BE49-F238E27FC236}">
+                <a16:creationId xmlns:a16="http://schemas.microsoft.com/office/drawing/2014/main" id="{8C9305BF-FF76-0658-6342-2FAB66251029}"/>
+              </a:ext>
+            </a:extLst>
+          </p:cNvPr>
+          <p:cNvSpPr txBox="1"/>
+          <p:nvPr/>
+        </p:nvSpPr>
+        <p:spPr>
+          <a:xfrm>
+            <a:off x="508365" y="4302572"/>
+            <a:ext cx="11461028" cy="646331"/>
+          </a:xfrm>
+          <a:prstGeom prst="rect">
+            <a:avLst/>
+          </a:prstGeom>
+          <a:noFill/>
+        </p:spPr>
+        <p:txBody>
+          <a:bodyPr wrap="square">
+            <a:spAutoFit/>
+          </a:bodyPr>
+          <a:lstStyle/>
+          <a:p>
+            <a:r>
+              <a:rPr lang="en-US" altLang="zh-CN" dirty="0"/>
+              <a:t>ARI Control Register: ARI</a:t>
+            </a:r>
+            <a:r>
+              <a:rPr lang="zh-CN" altLang="en-US" dirty="0"/>
+              <a:t>控制寄存器，用以开启</a:t>
+            </a:r>
+            <a:r>
+              <a:rPr lang="en-US" altLang="zh-CN" dirty="0"/>
+              <a:t>MFVS Function Group capability</a:t>
+            </a:r>
+            <a:r>
+              <a:rPr lang="zh-CN" altLang="en-US" dirty="0"/>
+              <a:t>及</a:t>
+            </a:r>
+            <a:r>
+              <a:rPr lang="en-US" altLang="zh-CN" dirty="0"/>
+              <a:t>ACS Function Groups capability</a:t>
+            </a:r>
+            <a:r>
+              <a:rPr lang="zh-CN" altLang="en-US" dirty="0"/>
+              <a:t>。</a:t>
+            </a:r>
+            <a:endParaRPr lang="en-US" altLang="zh-CN" dirty="0"/>
+          </a:p>
+          <a:p>
+            <a:r>
+              <a:rPr lang="en-US" altLang="zh-CN" dirty="0"/>
+              <a:t>	</a:t>
+            </a:r>
+            <a:r>
+              <a:rPr lang="en-US" altLang="zh-CN" dirty="0" err="1"/>
+              <a:t>Fcuntion</a:t>
+            </a:r>
+            <a:r>
+              <a:rPr lang="en-US" altLang="zh-CN" dirty="0"/>
+              <a:t> Group</a:t>
+            </a:r>
+            <a:r>
+              <a:rPr lang="zh-CN" altLang="en-US" dirty="0"/>
+              <a:t>字段用以指示当前</a:t>
+            </a:r>
+            <a:r>
+              <a:rPr lang="en-US" altLang="zh-CN" dirty="0"/>
+              <a:t>Function</a:t>
+            </a:r>
+            <a:r>
+              <a:rPr lang="zh-CN" altLang="en-US" dirty="0"/>
+              <a:t>所属的</a:t>
+            </a:r>
+            <a:r>
+              <a:rPr lang="en-US" altLang="zh-CN" dirty="0"/>
+              <a:t>Function Group Number</a:t>
+            </a:r>
+            <a:endParaRPr lang="zh-CN" altLang="en-US" dirty="0"/>
+          </a:p>
+        </p:txBody>
+      </p:sp>
+    </p:spTree>
+    <p:extLst>
+      <p:ext uri="{BB962C8B-B14F-4D97-AF65-F5344CB8AC3E}">
+        <p14:creationId xmlns:p14="http://schemas.microsoft.com/office/powerpoint/2010/main" val="68815453"/>
+      </p:ext>
+    </p:extLst>
+  </p:cSld>
+  <p:clrMapOvr>
+    <a:masterClrMapping/>
+  </p:clrMapOvr>
+</p:sld>
+</file>
+
+<file path=ppt/slides/slide22.xml><?xml version="1.0" encoding="utf-8"?>
+<p:sld xmlns:a="http://schemas.openxmlformats.org/drawingml/2006/main" xmlns:r="http://schemas.openxmlformats.org/officeDocument/2006/relationships" xmlns:p="http://schemas.openxmlformats.org/presentationml/2006/main">
+  <p:cSld>
+    <p:spTree>
+      <p:nvGrpSpPr>
+        <p:cNvPr id="1" name="">
+          <a:extLst>
+            <a:ext uri="{FF2B5EF4-FFF2-40B4-BE49-F238E27FC236}">
+              <a16:creationId xmlns:a16="http://schemas.microsoft.com/office/drawing/2014/main" id="{1AB54BC4-CCF2-ED8F-6B99-DEE856ED9145}"/>
+            </a:ext>
+          </a:extLst>
+        </p:cNvPr>
+        <p:cNvGrpSpPr/>
+        <p:nvPr/>
+      </p:nvGrpSpPr>
+      <p:grpSpPr>
+        <a:xfrm>
+          <a:off x="0" y="0"/>
+          <a:ext cx="0" cy="0"/>
+          <a:chOff x="0" y="0"/>
+          <a:chExt cx="0" cy="0"/>
+        </a:xfrm>
+      </p:grpSpPr>
+      <p:pic>
+        <p:nvPicPr>
+          <p:cNvPr id="3" name="图片 2">
+            <a:extLst>
+              <a:ext uri="{FF2B5EF4-FFF2-40B4-BE49-F238E27FC236}">
+                <a16:creationId xmlns:a16="http://schemas.microsoft.com/office/drawing/2014/main" id="{B845B69B-E4B0-57DD-122A-B2DD938672E6}"/>
+              </a:ext>
+            </a:extLst>
+          </p:cNvPr>
+          <p:cNvPicPr>
+            <a:picLocks noChangeAspect="1"/>
+          </p:cNvPicPr>
+          <p:nvPr/>
+        </p:nvPicPr>
+        <p:blipFill>
+          <a:blip r:embed="rId3"/>
+          <a:stretch>
+            <a:fillRect/>
+          </a:stretch>
+        </p:blipFill>
+        <p:spPr>
+          <a:xfrm>
+            <a:off x="2654315" y="0"/>
+            <a:ext cx="6883369" cy="6858000"/>
+          </a:xfrm>
+          <a:prstGeom prst="rect">
+            <a:avLst/>
+          </a:prstGeom>
+        </p:spPr>
+      </p:pic>
+      <p:sp>
+        <p:nvSpPr>
+          <p:cNvPr id="4" name="标题 6">
+            <a:extLst>
+              <a:ext uri="{FF2B5EF4-FFF2-40B4-BE49-F238E27FC236}">
+                <a16:creationId xmlns:a16="http://schemas.microsoft.com/office/drawing/2014/main" id="{B7C9BDFB-3268-E741-8662-1F2F55AB3D24}"/>
+              </a:ext>
+            </a:extLst>
+          </p:cNvPr>
+          <p:cNvSpPr>
+            <a:spLocks noGrp="1"/>
+          </p:cNvSpPr>
+          <p:nvPr>
+            <p:ph type="title"/>
+            <p:custDataLst>
+              <p:tags r:id="rId1"/>
+            </p:custDataLst>
+          </p:nvPr>
+        </p:nvSpPr>
+        <p:spPr>
+          <a:xfrm>
+            <a:off x="107505" y="188640"/>
+            <a:ext cx="2546810" cy="461010"/>
+          </a:xfrm>
+        </p:spPr>
+        <p:txBody>
+          <a:bodyPr>
+            <a:normAutofit fontScale="90000"/>
+          </a:bodyPr>
+          <a:lstStyle/>
+          <a:p>
+            <a:pPr algn="l"/>
+            <a:r>
+              <a:rPr lang="en-US" altLang="zh-CN" sz="3600" dirty="0">
+                <a:gradFill>
+                  <a:gsLst>
+                    <a:gs pos="0">
+                      <a:srgbClr val="E30000"/>
+                    </a:gs>
+                    <a:gs pos="100000">
+                      <a:srgbClr val="760303"/>
+                    </a:gs>
+                  </a:gsLst>
+                  <a:lin scaled="0"/>
+                </a:gradFill>
+              </a:rPr>
+              <a:t>ARI</a:t>
+            </a:r>
+            <a:r>
+              <a:rPr lang="zh-CN" altLang="en-US" sz="3600" dirty="0">
+                <a:gradFill>
+                  <a:gsLst>
+                    <a:gs pos="0">
+                      <a:srgbClr val="E30000"/>
+                    </a:gs>
+                    <a:gs pos="100000">
+                      <a:srgbClr val="760303"/>
+                    </a:gs>
+                  </a:gsLst>
+                  <a:lin scaled="0"/>
+                </a:gradFill>
+              </a:rPr>
+              <a:t>设备拓扑</a:t>
+            </a:r>
+          </a:p>
+        </p:txBody>
+      </p:sp>
+    </p:spTree>
+    <p:extLst>
+      <p:ext uri="{BB962C8B-B14F-4D97-AF65-F5344CB8AC3E}">
+        <p14:creationId xmlns:p14="http://schemas.microsoft.com/office/powerpoint/2010/main" val="1826090847"/>
+      </p:ext>
+    </p:extLst>
+  </p:cSld>
+  <p:clrMapOvr>
+    <a:masterClrMapping/>
+  </p:clrMapOvr>
+</p:sld>
+</file>
+
+<file path=ppt/slides/slide23.xml><?xml version="1.0" encoding="utf-8"?>
+<p:sld xmlns:a="http://schemas.openxmlformats.org/drawingml/2006/main" xmlns:r="http://schemas.openxmlformats.org/officeDocument/2006/relationships" xmlns:p="http://schemas.openxmlformats.org/presentationml/2006/main">
+  <p:cSld>
+    <p:spTree>
+      <p:nvGrpSpPr>
+        <p:cNvPr id="1" name="">
+          <a:extLst>
+            <a:ext uri="{FF2B5EF4-FFF2-40B4-BE49-F238E27FC236}">
+              <a16:creationId xmlns:a16="http://schemas.microsoft.com/office/drawing/2014/main" id="{EC0B666D-5988-119A-27AD-86F2B6F0683E}"/>
+            </a:ext>
+          </a:extLst>
+        </p:cNvPr>
+        <p:cNvGrpSpPr/>
+        <p:nvPr/>
+      </p:nvGrpSpPr>
+      <p:grpSpPr>
+        <a:xfrm>
+          <a:off x="0" y="0"/>
+          <a:ext cx="0" cy="0"/>
+          <a:chOff x="0" y="0"/>
+          <a:chExt cx="0" cy="0"/>
+        </a:xfrm>
+      </p:grpSpPr>
+    </p:spTree>
+    <p:extLst>
+      <p:ext uri="{BB962C8B-B14F-4D97-AF65-F5344CB8AC3E}">
+        <p14:creationId xmlns:p14="http://schemas.microsoft.com/office/powerpoint/2010/main" val="2044740292"/>
+      </p:ext>
+    </p:extLst>
+  </p:cSld>
+  <p:clrMapOvr>
+    <a:masterClrMapping/>
+  </p:clrMapOvr>
+</p:sld>
+</file>
+
+<file path=ppt/slides/slide24.xml><?xml version="1.0" encoding="utf-8"?>
+<p:sld xmlns:a="http://schemas.openxmlformats.org/drawingml/2006/main" xmlns:r="http://schemas.openxmlformats.org/officeDocument/2006/relationships" xmlns:p="http://schemas.openxmlformats.org/presentationml/2006/main">
+  <p:cSld>
+    <p:spTree>
+      <p:nvGrpSpPr>
+        <p:cNvPr id="1" name="">
+          <a:extLst>
+            <a:ext uri="{FF2B5EF4-FFF2-40B4-BE49-F238E27FC236}">
+              <a16:creationId xmlns:a16="http://schemas.microsoft.com/office/drawing/2014/main" id="{042020F3-33C2-1412-7172-67C45293D0BF}"/>
+            </a:ext>
+          </a:extLst>
+        </p:cNvPr>
+        <p:cNvGrpSpPr/>
+        <p:nvPr/>
+      </p:nvGrpSpPr>
+      <p:grpSpPr>
+        <a:xfrm>
+          <a:off x="0" y="0"/>
+          <a:ext cx="0" cy="0"/>
+          <a:chOff x="0" y="0"/>
+          <a:chExt cx="0" cy="0"/>
+        </a:xfrm>
+      </p:grpSpPr>
+    </p:spTree>
+    <p:extLst>
+      <p:ext uri="{BB962C8B-B14F-4D97-AF65-F5344CB8AC3E}">
+        <p14:creationId xmlns:p14="http://schemas.microsoft.com/office/powerpoint/2010/main" val="780227861"/>
+      </p:ext>
+    </p:extLst>
+  </p:cSld>
+  <p:clrMapOvr>
+    <a:masterClrMapping/>
+  </p:clrMapOvr>
+</p:sld>
+</file>
+
+<file path=ppt/slides/slide25.xml><?xml version="1.0" encoding="utf-8"?>
+<p:sld xmlns:a="http://schemas.openxmlformats.org/drawingml/2006/main" xmlns:r="http://schemas.openxmlformats.org/officeDocument/2006/relationships" xmlns:p="http://schemas.openxmlformats.org/presentationml/2006/main">
+  <p:cSld>
+    <p:spTree>
+      <p:nvGrpSpPr>
+        <p:cNvPr id="1" name="">
+          <a:extLst>
+            <a:ext uri="{FF2B5EF4-FFF2-40B4-BE49-F238E27FC236}">
+              <a16:creationId xmlns:a16="http://schemas.microsoft.com/office/drawing/2014/main" id="{1A8AC43E-A436-B5CE-2378-9A114140FB88}"/>
+            </a:ext>
+          </a:extLst>
+        </p:cNvPr>
+        <p:cNvGrpSpPr/>
+        <p:nvPr/>
+      </p:nvGrpSpPr>
+      <p:grpSpPr>
+        <a:xfrm>
+          <a:off x="0" y="0"/>
+          <a:ext cx="0" cy="0"/>
+          <a:chOff x="0" y="0"/>
+          <a:chExt cx="0" cy="0"/>
+        </a:xfrm>
+      </p:grpSpPr>
+    </p:spTree>
+    <p:extLst>
+      <p:ext uri="{BB962C8B-B14F-4D97-AF65-F5344CB8AC3E}">
+        <p14:creationId xmlns:p14="http://schemas.microsoft.com/office/powerpoint/2010/main" val="3161016151"/>
+      </p:ext>
+    </p:extLst>
+  </p:cSld>
+  <p:clrMapOvr>
+    <a:masterClrMapping/>
+  </p:clrMapOvr>
+</p:sld>
+</file>
+
+<file path=ppt/slides/slide26.xml><?xml version="1.0" encoding="utf-8"?>
+<p:sld xmlns:a="http://schemas.openxmlformats.org/drawingml/2006/main" xmlns:r="http://schemas.openxmlformats.org/officeDocument/2006/relationships" xmlns:p="http://schemas.openxmlformats.org/presentationml/2006/main">
+  <p:cSld>
+    <p:spTree>
+      <p:nvGrpSpPr>
+        <p:cNvPr id="1" name="">
+          <a:extLst>
+            <a:ext uri="{FF2B5EF4-FFF2-40B4-BE49-F238E27FC236}">
+              <a16:creationId xmlns:a16="http://schemas.microsoft.com/office/drawing/2014/main" id="{74B93EDA-8910-273B-1493-C901C5D7E8BD}"/>
+            </a:ext>
+          </a:extLst>
+        </p:cNvPr>
+        <p:cNvGrpSpPr/>
+        <p:nvPr/>
+      </p:nvGrpSpPr>
+      <p:grpSpPr>
+        <a:xfrm>
+          <a:off x="0" y="0"/>
+          <a:ext cx="0" cy="0"/>
+          <a:chOff x="0" y="0"/>
+          <a:chExt cx="0" cy="0"/>
+        </a:xfrm>
+      </p:grpSpPr>
+    </p:spTree>
+    <p:extLst>
+      <p:ext uri="{BB962C8B-B14F-4D97-AF65-F5344CB8AC3E}">
+        <p14:creationId xmlns:p14="http://schemas.microsoft.com/office/powerpoint/2010/main" val="2311168615"/>
+      </p:ext>
+    </p:extLst>
+  </p:cSld>
+  <p:clrMapOvr>
+    <a:masterClrMapping/>
+  </p:clrMapOvr>
+</p:sld>
+</file>
+
+<file path=ppt/slides/slide27.xml><?xml version="1.0" encoding="utf-8"?>
+<p:sld xmlns:a="http://schemas.openxmlformats.org/drawingml/2006/main" xmlns:r="http://schemas.openxmlformats.org/officeDocument/2006/relationships" xmlns:p="http://schemas.openxmlformats.org/presentationml/2006/main">
+  <p:cSld>
+    <p:spTree>
+      <p:nvGrpSpPr>
+        <p:cNvPr id="1" name="">
+          <a:extLst>
+            <a:ext uri="{FF2B5EF4-FFF2-40B4-BE49-F238E27FC236}">
+              <a16:creationId xmlns:a16="http://schemas.microsoft.com/office/drawing/2014/main" id="{A2622369-B6AC-1AD0-BD55-B4130CFADE85}"/>
+            </a:ext>
+          </a:extLst>
+        </p:cNvPr>
+        <p:cNvGrpSpPr/>
+        <p:nvPr/>
+      </p:nvGrpSpPr>
+      <p:grpSpPr>
+        <a:xfrm>
+          <a:off x="0" y="0"/>
+          <a:ext cx="0" cy="0"/>
+          <a:chOff x="0" y="0"/>
+          <a:chExt cx="0" cy="0"/>
+        </a:xfrm>
+      </p:grpSpPr>
+    </p:spTree>
+    <p:extLst>
+      <p:ext uri="{BB962C8B-B14F-4D97-AF65-F5344CB8AC3E}">
+        <p14:creationId xmlns:p14="http://schemas.microsoft.com/office/powerpoint/2010/main" val="1452962120"/>
       </p:ext>
     </p:extLst>
   </p:cSld>
@@ -12257,6 +14836,24 @@
 </file>
 
 <file path=ppt/tags/tag4.xml><?xml version="1.0" encoding="utf-8"?>
+<p:tagLst xmlns:a="http://schemas.openxmlformats.org/drawingml/2006/main" xmlns:r="http://schemas.openxmlformats.org/officeDocument/2006/relationships" xmlns:p="http://schemas.openxmlformats.org/presentationml/2006/main">
+  <p:tag name="KSO_WM_BEAUTIFY_FLAG" val=""/>
+</p:tagLst>
+</file>
+
+<file path=ppt/tags/tag5.xml><?xml version="1.0" encoding="utf-8"?>
+<p:tagLst xmlns:a="http://schemas.openxmlformats.org/drawingml/2006/main" xmlns:r="http://schemas.openxmlformats.org/officeDocument/2006/relationships" xmlns:p="http://schemas.openxmlformats.org/presentationml/2006/main">
+  <p:tag name="KSO_WM_BEAUTIFY_FLAG" val=""/>
+</p:tagLst>
+</file>
+
+<file path=ppt/tags/tag6.xml><?xml version="1.0" encoding="utf-8"?>
+<p:tagLst xmlns:a="http://schemas.openxmlformats.org/drawingml/2006/main" xmlns:r="http://schemas.openxmlformats.org/officeDocument/2006/relationships" xmlns:p="http://schemas.openxmlformats.org/presentationml/2006/main">
+  <p:tag name="KSO_WM_BEAUTIFY_FLAG" val=""/>
+</p:tagLst>
+</file>
+
+<file path=ppt/tags/tag7.xml><?xml version="1.0" encoding="utf-8"?>
 <p:tagLst xmlns:a="http://schemas.openxmlformats.org/drawingml/2006/main" xmlns:r="http://schemas.openxmlformats.org/officeDocument/2006/relationships" xmlns:p="http://schemas.openxmlformats.org/presentationml/2006/main">
   <p:tag name="KSO_WM_BEAUTIFY_FLAG" val=""/>
 </p:tagLst>
